--- a/PresentacionSemana10/Avances semana 10.pptx
+++ b/PresentacionSemana10/Avances semana 10.pptx
@@ -5247,50 +5247,6 @@
       </p:sp>
       <p:sp>
         <p:nvSpPr>
-          <p:cNvPr id="23" name="Text 15"/>
-          <p:cNvSpPr/>
-          <p:nvPr/>
-        </p:nvSpPr>
-        <p:spPr>
-          <a:xfrm>
-            <a:off x="812800" y="6261100"/>
-            <a:ext cx="7848600" cy="215900"/>
-          </a:xfrm>
-          <a:prstGeom prst="rect">
-            <a:avLst/>
-          </a:prstGeom>
-          <a:noFill/>
-          <a:ln/>
-        </p:spPr>
-        <p:txBody>
-          <a:bodyPr wrap="square" lIns="0" tIns="0" rIns="0" bIns="0" rtlCol="0" anchor="t">
-            <a:normAutofit/>
-          </a:bodyPr>
-          <a:lstStyle/>
-          <a:p>
-            <a:pPr marL="0" indent="0" algn="l">
-              <a:lnSpc>
-                <a:spcPts val="1500"/>
-              </a:lnSpc>
-              <a:buNone/>
-            </a:pPr>
-            <a:r>
-              <a:rPr lang="en-US" sz="1200" dirty="0">
-                <a:solidFill>
-                  <a:srgbClr val="6E6E6C"/>
-                </a:solidFill>
-                <a:latin typeface="Roboto" pitchFamily="34" charset="0"/>
-                <a:ea typeface="Roboto" pitchFamily="34" charset="-122"/>
-                <a:cs typeface="Roboto" pitchFamily="34" charset="-120"/>
-              </a:rPr>
-              <a:t>Avances semana 9 · Privacidad diferencial cuántica</a:t>
-            </a:r>
-            <a:endParaRPr lang="en-US" sz="1200" dirty="0"/>
-          </a:p>
-        </p:txBody>
-      </p:sp>
-      <p:sp>
-        <p:nvSpPr>
           <p:cNvPr id="24" name="Text 16"/>
           <p:cNvSpPr/>
           <p:nvPr/>
@@ -6756,50 +6712,6 @@
       </p:sp>
       <p:sp>
         <p:nvSpPr>
-          <p:cNvPr id="39" name="Text 32"/>
-          <p:cNvSpPr/>
-          <p:nvPr/>
-        </p:nvSpPr>
-        <p:spPr>
-          <a:xfrm>
-            <a:off x="812800" y="6261100"/>
-            <a:ext cx="7848600" cy="215900"/>
-          </a:xfrm>
-          <a:prstGeom prst="rect">
-            <a:avLst/>
-          </a:prstGeom>
-          <a:noFill/>
-          <a:ln/>
-        </p:spPr>
-        <p:txBody>
-          <a:bodyPr wrap="square" lIns="0" tIns="0" rIns="0" bIns="0" rtlCol="0" anchor="t">
-            <a:normAutofit/>
-          </a:bodyPr>
-          <a:lstStyle/>
-          <a:p>
-            <a:pPr marL="0" indent="0" algn="l">
-              <a:lnSpc>
-                <a:spcPts val="1500"/>
-              </a:lnSpc>
-              <a:buNone/>
-            </a:pPr>
-            <a:r>
-              <a:rPr lang="en-US" sz="1200" dirty="0">
-                <a:solidFill>
-                  <a:srgbClr val="6E6E6C"/>
-                </a:solidFill>
-                <a:latin typeface="Roboto" pitchFamily="34" charset="0"/>
-                <a:ea typeface="Roboto" pitchFamily="34" charset="-122"/>
-                <a:cs typeface="Roboto" pitchFamily="34" charset="-120"/>
-              </a:rPr>
-              <a:t>Avances semana 9 · Privacidad diferencial cuántica</a:t>
-            </a:r>
-            <a:endParaRPr lang="en-US" sz="1200" dirty="0"/>
-          </a:p>
-        </p:txBody>
-      </p:sp>
-      <p:sp>
-        <p:nvSpPr>
           <p:cNvPr id="40" name="Text 33"/>
           <p:cNvSpPr/>
           <p:nvPr/>
@@ -7535,50 +7447,6 @@
       </p:sp>
       <p:sp>
         <p:nvSpPr>
-          <p:cNvPr id="19" name="Text 14"/>
-          <p:cNvSpPr/>
-          <p:nvPr/>
-        </p:nvSpPr>
-        <p:spPr>
-          <a:xfrm>
-            <a:off x="812800" y="6261100"/>
-            <a:ext cx="7848600" cy="215900"/>
-          </a:xfrm>
-          <a:prstGeom prst="rect">
-            <a:avLst/>
-          </a:prstGeom>
-          <a:noFill/>
-          <a:ln/>
-        </p:spPr>
-        <p:txBody>
-          <a:bodyPr wrap="square" lIns="0" tIns="0" rIns="0" bIns="0" rtlCol="0" anchor="t">
-            <a:normAutofit/>
-          </a:bodyPr>
-          <a:lstStyle/>
-          <a:p>
-            <a:pPr marL="0" indent="0" algn="l">
-              <a:lnSpc>
-                <a:spcPts val="1500"/>
-              </a:lnSpc>
-              <a:buNone/>
-            </a:pPr>
-            <a:r>
-              <a:rPr lang="en-US" sz="1200" dirty="0">
-                <a:solidFill>
-                  <a:srgbClr val="6E6E6C"/>
-                </a:solidFill>
-                <a:latin typeface="Roboto" pitchFamily="34" charset="0"/>
-                <a:ea typeface="Roboto" pitchFamily="34" charset="-122"/>
-                <a:cs typeface="Roboto" pitchFamily="34" charset="-120"/>
-              </a:rPr>
-              <a:t>Avances semana 9 · Privacidad diferencial cuántica</a:t>
-            </a:r>
-            <a:endParaRPr lang="en-US" sz="1200" dirty="0"/>
-          </a:p>
-        </p:txBody>
-      </p:sp>
-      <p:sp>
-        <p:nvSpPr>
           <p:cNvPr id="20" name="Text 15"/>
           <p:cNvSpPr/>
           <p:nvPr/>
@@ -9451,50 +9319,6 @@
       </p:sp>
       <p:sp>
         <p:nvSpPr>
-          <p:cNvPr id="52" name="Text 38"/>
-          <p:cNvSpPr/>
-          <p:nvPr/>
-        </p:nvSpPr>
-        <p:spPr>
-          <a:xfrm>
-            <a:off x="812800" y="6261100"/>
-            <a:ext cx="7848600" cy="215900"/>
-          </a:xfrm>
-          <a:prstGeom prst="rect">
-            <a:avLst/>
-          </a:prstGeom>
-          <a:noFill/>
-          <a:ln/>
-        </p:spPr>
-        <p:txBody>
-          <a:bodyPr wrap="square" lIns="0" tIns="0" rIns="0" bIns="0" rtlCol="0" anchor="t">
-            <a:normAutofit/>
-          </a:bodyPr>
-          <a:lstStyle/>
-          <a:p>
-            <a:pPr marL="0" indent="0" algn="l">
-              <a:lnSpc>
-                <a:spcPts val="1500"/>
-              </a:lnSpc>
-              <a:buNone/>
-            </a:pPr>
-            <a:r>
-              <a:rPr lang="en-US" sz="1200" dirty="0">
-                <a:solidFill>
-                  <a:srgbClr val="6E6E6C"/>
-                </a:solidFill>
-                <a:latin typeface="Roboto" pitchFamily="34" charset="0"/>
-                <a:ea typeface="Roboto" pitchFamily="34" charset="-122"/>
-                <a:cs typeface="Roboto" pitchFamily="34" charset="-120"/>
-              </a:rPr>
-              <a:t>Avances semana 9 · Privacidad diferencial cuántica</a:t>
-            </a:r>
-            <a:endParaRPr lang="en-US" sz="1200" dirty="0"/>
-          </a:p>
-        </p:txBody>
-      </p:sp>
-      <p:sp>
-        <p:nvSpPr>
           <p:cNvPr id="53" name="Text 39"/>
           <p:cNvSpPr/>
           <p:nvPr/>
@@ -11422,50 +11246,6 @@
       </p:sp>
       <p:sp>
         <p:nvSpPr>
-          <p:cNvPr id="52" name="Text 39"/>
-          <p:cNvSpPr/>
-          <p:nvPr/>
-        </p:nvSpPr>
-        <p:spPr>
-          <a:xfrm>
-            <a:off x="812800" y="6261100"/>
-            <a:ext cx="7848600" cy="215900"/>
-          </a:xfrm>
-          <a:prstGeom prst="rect">
-            <a:avLst/>
-          </a:prstGeom>
-          <a:noFill/>
-          <a:ln/>
-        </p:spPr>
-        <p:txBody>
-          <a:bodyPr wrap="square" lIns="0" tIns="0" rIns="0" bIns="0" rtlCol="0" anchor="t">
-            <a:normAutofit/>
-          </a:bodyPr>
-          <a:lstStyle/>
-          <a:p>
-            <a:pPr marL="0" indent="0" algn="l">
-              <a:lnSpc>
-                <a:spcPts val="1500"/>
-              </a:lnSpc>
-              <a:buNone/>
-            </a:pPr>
-            <a:r>
-              <a:rPr lang="en-US" sz="1200" dirty="0">
-                <a:solidFill>
-                  <a:srgbClr val="6E6E6C"/>
-                </a:solidFill>
-                <a:latin typeface="Roboto" pitchFamily="34" charset="0"/>
-                <a:ea typeface="Roboto" pitchFamily="34" charset="-122"/>
-                <a:cs typeface="Roboto" pitchFamily="34" charset="-120"/>
-              </a:rPr>
-              <a:t>Avances semana 9 · Privacidad diferencial cuántica</a:t>
-            </a:r>
-            <a:endParaRPr lang="en-US" sz="1200" dirty="0"/>
-          </a:p>
-        </p:txBody>
-      </p:sp>
-      <p:sp>
-        <p:nvSpPr>
           <p:cNvPr id="53" name="Text 40"/>
           <p:cNvSpPr/>
           <p:nvPr/>
@@ -12821,50 +12601,6 @@
               <a:t>mezcla los dos efectos: le atribuiría a la privacidad un error que viene de la codificación.</a:t>
             </a:r>
             <a:endParaRPr lang="en-US" sz="1400" dirty="0"/>
-          </a:p>
-        </p:txBody>
-      </p:sp>
-      <p:sp>
-        <p:nvSpPr>
-          <p:cNvPr id="31" name="Text 27"/>
-          <p:cNvSpPr/>
-          <p:nvPr/>
-        </p:nvSpPr>
-        <p:spPr>
-          <a:xfrm>
-            <a:off x="812800" y="6261100"/>
-            <a:ext cx="7848600" cy="215900"/>
-          </a:xfrm>
-          <a:prstGeom prst="rect">
-            <a:avLst/>
-          </a:prstGeom>
-          <a:noFill/>
-          <a:ln/>
-        </p:spPr>
-        <p:txBody>
-          <a:bodyPr wrap="square" lIns="0" tIns="0" rIns="0" bIns="0" rtlCol="0" anchor="t">
-            <a:normAutofit/>
-          </a:bodyPr>
-          <a:lstStyle/>
-          <a:p>
-            <a:pPr marL="0" indent="0" algn="l">
-              <a:lnSpc>
-                <a:spcPts val="1500"/>
-              </a:lnSpc>
-              <a:buNone/>
-            </a:pPr>
-            <a:r>
-              <a:rPr lang="en-US" sz="1200" dirty="0">
-                <a:solidFill>
-                  <a:srgbClr val="6E6E6C"/>
-                </a:solidFill>
-                <a:latin typeface="Roboto" pitchFamily="34" charset="0"/>
-                <a:ea typeface="Roboto" pitchFamily="34" charset="-122"/>
-                <a:cs typeface="Roboto" pitchFamily="34" charset="-120"/>
-              </a:rPr>
-              <a:t>Avances semana 9 · Privacidad diferencial cuántica</a:t>
-            </a:r>
-            <a:endParaRPr lang="en-US" sz="1200" dirty="0"/>
           </a:p>
         </p:txBody>
       </p:sp>
@@ -12987,7 +12723,7 @@
         </p:spPr>
         <p:txBody>
           <a:bodyPr wrap="square" lIns="0" tIns="0" rIns="0" bIns="0" rtlCol="0" anchor="t">
-            <a:normAutofit/>
+            <a:normAutofit fontScale="92500"/>
           </a:bodyPr>
           <a:lstStyle/>
           <a:p>
@@ -14632,50 +14368,6 @@
       </p:sp>
       <p:sp>
         <p:nvSpPr>
-          <p:cNvPr id="38" name="Text 30"/>
-          <p:cNvSpPr/>
-          <p:nvPr/>
-        </p:nvSpPr>
-        <p:spPr>
-          <a:xfrm>
-            <a:off x="812800" y="6261100"/>
-            <a:ext cx="7848600" cy="215900"/>
-          </a:xfrm>
-          <a:prstGeom prst="rect">
-            <a:avLst/>
-          </a:prstGeom>
-          <a:noFill/>
-          <a:ln/>
-        </p:spPr>
-        <p:txBody>
-          <a:bodyPr wrap="square" lIns="0" tIns="0" rIns="0" bIns="0" rtlCol="0" anchor="t">
-            <a:normAutofit/>
-          </a:bodyPr>
-          <a:lstStyle/>
-          <a:p>
-            <a:pPr marL="0" indent="0" algn="l">
-              <a:lnSpc>
-                <a:spcPts val="1500"/>
-              </a:lnSpc>
-              <a:buNone/>
-            </a:pPr>
-            <a:r>
-              <a:rPr lang="en-US" sz="1200" dirty="0">
-                <a:solidFill>
-                  <a:srgbClr val="6E6E6C"/>
-                </a:solidFill>
-                <a:latin typeface="Roboto" pitchFamily="34" charset="0"/>
-                <a:ea typeface="Roboto" pitchFamily="34" charset="-122"/>
-                <a:cs typeface="Roboto" pitchFamily="34" charset="-120"/>
-              </a:rPr>
-              <a:t>Avances semana 9 · Privacidad diferencial cuántica</a:t>
-            </a:r>
-            <a:endParaRPr lang="en-US" sz="1200" dirty="0"/>
-          </a:p>
-        </p:txBody>
-      </p:sp>
-      <p:sp>
-        <p:nvSpPr>
           <p:cNvPr id="39" name="Text 31"/>
           <p:cNvSpPr/>
           <p:nvPr/>
@@ -16126,50 +15818,6 @@
       </p:sp>
       <p:sp>
         <p:nvSpPr>
-          <p:cNvPr id="37" name="Text 33"/>
-          <p:cNvSpPr/>
-          <p:nvPr/>
-        </p:nvSpPr>
-        <p:spPr>
-          <a:xfrm>
-            <a:off x="812800" y="6261100"/>
-            <a:ext cx="7848600" cy="215900"/>
-          </a:xfrm>
-          <a:prstGeom prst="rect">
-            <a:avLst/>
-          </a:prstGeom>
-          <a:noFill/>
-          <a:ln/>
-        </p:spPr>
-        <p:txBody>
-          <a:bodyPr wrap="square" lIns="0" tIns="0" rIns="0" bIns="0" rtlCol="0" anchor="t">
-            <a:normAutofit/>
-          </a:bodyPr>
-          <a:lstStyle/>
-          <a:p>
-            <a:pPr marL="0" indent="0" algn="l">
-              <a:lnSpc>
-                <a:spcPts val="1500"/>
-              </a:lnSpc>
-              <a:buNone/>
-            </a:pPr>
-            <a:r>
-              <a:rPr lang="en-US" sz="1200" dirty="0">
-                <a:solidFill>
-                  <a:srgbClr val="6E6E6C"/>
-                </a:solidFill>
-                <a:latin typeface="Roboto" pitchFamily="34" charset="0"/>
-                <a:ea typeface="Roboto" pitchFamily="34" charset="-122"/>
-                <a:cs typeface="Roboto" pitchFamily="34" charset="-120"/>
-              </a:rPr>
-              <a:t>Avances semana 9 · Privacidad diferencial cuántica</a:t>
-            </a:r>
-            <a:endParaRPr lang="en-US" sz="1200" dirty="0"/>
-          </a:p>
-        </p:txBody>
-      </p:sp>
-      <p:sp>
-        <p:nvSpPr>
           <p:cNvPr id="38" name="Text 34"/>
           <p:cNvSpPr/>
           <p:nvPr/>
@@ -17126,7 +16774,7 @@
         </p:spPr>
         <p:txBody>
           <a:bodyPr wrap="square" lIns="0" tIns="0" rIns="0" bIns="0" rtlCol="0" anchor="t">
-            <a:normAutofit/>
+            <a:normAutofit fontScale="92500"/>
           </a:bodyPr>
           <a:lstStyle/>
           <a:p>
@@ -17234,50 +16882,6 @@
                 <a:cs typeface="Roboto" pitchFamily="34" charset="-120"/>
               </a:rPr>
               <a:t>e^ε con ε = ln 3, sepa lo que sepa de antemano.</a:t>
-            </a:r>
-            <a:endParaRPr lang="en-US" sz="1200" dirty="0"/>
-          </a:p>
-        </p:txBody>
-      </p:sp>
-      <p:sp>
-        <p:nvSpPr>
-          <p:cNvPr id="22" name="Text 17"/>
-          <p:cNvSpPr/>
-          <p:nvPr/>
-        </p:nvSpPr>
-        <p:spPr>
-          <a:xfrm>
-            <a:off x="812800" y="6261100"/>
-            <a:ext cx="7848600" cy="215900"/>
-          </a:xfrm>
-          <a:prstGeom prst="rect">
-            <a:avLst/>
-          </a:prstGeom>
-          <a:noFill/>
-          <a:ln/>
-        </p:spPr>
-        <p:txBody>
-          <a:bodyPr wrap="square" lIns="0" tIns="0" rIns="0" bIns="0" rtlCol="0" anchor="t">
-            <a:normAutofit/>
-          </a:bodyPr>
-          <a:lstStyle/>
-          <a:p>
-            <a:pPr marL="0" indent="0" algn="l">
-              <a:lnSpc>
-                <a:spcPts val="1500"/>
-              </a:lnSpc>
-              <a:buNone/>
-            </a:pPr>
-            <a:r>
-              <a:rPr lang="en-US" sz="1200" dirty="0">
-                <a:solidFill>
-                  <a:srgbClr val="6E6E6C"/>
-                </a:solidFill>
-                <a:latin typeface="Roboto" pitchFamily="34" charset="0"/>
-                <a:ea typeface="Roboto" pitchFamily="34" charset="-122"/>
-                <a:cs typeface="Roboto" pitchFamily="34" charset="-120"/>
-              </a:rPr>
-              <a:t>Avances semana 9 · Privacidad diferencial cuántica</a:t>
             </a:r>
             <a:endParaRPr lang="en-US" sz="1200" dirty="0"/>
           </a:p>
@@ -18878,50 +18482,6 @@
       </p:sp>
       <p:sp>
         <p:nvSpPr>
-          <p:cNvPr id="38" name="Text 35"/>
-          <p:cNvSpPr/>
-          <p:nvPr/>
-        </p:nvSpPr>
-        <p:spPr>
-          <a:xfrm>
-            <a:off x="812800" y="6261100"/>
-            <a:ext cx="7848600" cy="215900"/>
-          </a:xfrm>
-          <a:prstGeom prst="rect">
-            <a:avLst/>
-          </a:prstGeom>
-          <a:noFill/>
-          <a:ln/>
-        </p:spPr>
-        <p:txBody>
-          <a:bodyPr wrap="square" lIns="0" tIns="0" rIns="0" bIns="0" rtlCol="0" anchor="t">
-            <a:normAutofit/>
-          </a:bodyPr>
-          <a:lstStyle/>
-          <a:p>
-            <a:pPr marL="0" indent="0" algn="l">
-              <a:lnSpc>
-                <a:spcPts val="1500"/>
-              </a:lnSpc>
-              <a:buNone/>
-            </a:pPr>
-            <a:r>
-              <a:rPr lang="en-US" sz="1200" dirty="0">
-                <a:solidFill>
-                  <a:srgbClr val="6E6E6C"/>
-                </a:solidFill>
-                <a:latin typeface="Roboto" pitchFamily="34" charset="0"/>
-                <a:ea typeface="Roboto" pitchFamily="34" charset="-122"/>
-                <a:cs typeface="Roboto" pitchFamily="34" charset="-120"/>
-              </a:rPr>
-              <a:t>Avances semana 9 · Privacidad diferencial cuántica</a:t>
-            </a:r>
-            <a:endParaRPr lang="en-US" sz="1200" dirty="0"/>
-          </a:p>
-        </p:txBody>
-      </p:sp>
-      <p:sp>
-        <p:nvSpPr>
           <p:cNvPr id="39" name="Text 36"/>
           <p:cNvSpPr/>
           <p:nvPr/>
@@ -20020,50 +19580,6 @@
               <a:t> cada lectura vuelve a multiplicar.</a:t>
             </a:r>
             <a:endParaRPr lang="en-US" sz="1400" dirty="0"/>
-          </a:p>
-        </p:txBody>
-      </p:sp>
-      <p:sp>
-        <p:nvSpPr>
-          <p:cNvPr id="28" name="Text 24"/>
-          <p:cNvSpPr/>
-          <p:nvPr/>
-        </p:nvSpPr>
-        <p:spPr>
-          <a:xfrm>
-            <a:off x="812800" y="6261100"/>
-            <a:ext cx="7848600" cy="215900"/>
-          </a:xfrm>
-          <a:prstGeom prst="rect">
-            <a:avLst/>
-          </a:prstGeom>
-          <a:noFill/>
-          <a:ln/>
-        </p:spPr>
-        <p:txBody>
-          <a:bodyPr wrap="square" lIns="0" tIns="0" rIns="0" bIns="0" rtlCol="0" anchor="t">
-            <a:normAutofit/>
-          </a:bodyPr>
-          <a:lstStyle/>
-          <a:p>
-            <a:pPr marL="0" indent="0" algn="l">
-              <a:lnSpc>
-                <a:spcPts val="1500"/>
-              </a:lnSpc>
-              <a:buNone/>
-            </a:pPr>
-            <a:r>
-              <a:rPr lang="en-US" sz="1200" dirty="0">
-                <a:solidFill>
-                  <a:srgbClr val="6E6E6C"/>
-                </a:solidFill>
-                <a:latin typeface="Roboto" pitchFamily="34" charset="0"/>
-                <a:ea typeface="Roboto" pitchFamily="34" charset="-122"/>
-                <a:cs typeface="Roboto" pitchFamily="34" charset="-120"/>
-              </a:rPr>
-              <a:t>Avances semana 9 · Privacidad diferencial cuántica</a:t>
-            </a:r>
-            <a:endParaRPr lang="en-US" sz="1200" dirty="0"/>
           </a:p>
         </p:txBody>
       </p:sp>
@@ -21757,50 +21273,6 @@
       </p:sp>
       <p:sp>
         <p:nvSpPr>
-          <p:cNvPr id="16" name="Text 12"/>
-          <p:cNvSpPr/>
-          <p:nvPr/>
-        </p:nvSpPr>
-        <p:spPr>
-          <a:xfrm>
-            <a:off x="812800" y="6261100"/>
-            <a:ext cx="7848600" cy="215900"/>
-          </a:xfrm>
-          <a:prstGeom prst="rect">
-            <a:avLst/>
-          </a:prstGeom>
-          <a:noFill/>
-          <a:ln/>
-        </p:spPr>
-        <p:txBody>
-          <a:bodyPr wrap="square" lIns="0" tIns="0" rIns="0" bIns="0" rtlCol="0" anchor="t">
-            <a:normAutofit/>
-          </a:bodyPr>
-          <a:lstStyle/>
-          <a:p>
-            <a:pPr marL="0" indent="0" algn="l">
-              <a:lnSpc>
-                <a:spcPts val="1500"/>
-              </a:lnSpc>
-              <a:buNone/>
-            </a:pPr>
-            <a:r>
-              <a:rPr lang="en-US" sz="1200" dirty="0">
-                <a:solidFill>
-                  <a:srgbClr val="6E6E6C"/>
-                </a:solidFill>
-                <a:latin typeface="Roboto" pitchFamily="34" charset="0"/>
-                <a:ea typeface="Roboto" pitchFamily="34" charset="-122"/>
-                <a:cs typeface="Roboto" pitchFamily="34" charset="-120"/>
-              </a:rPr>
-              <a:t>Avances semana 9 · Privacidad diferencial cuántica</a:t>
-            </a:r>
-            <a:endParaRPr lang="en-US" sz="1200" dirty="0"/>
-          </a:p>
-        </p:txBody>
-      </p:sp>
-      <p:sp>
-        <p:nvSpPr>
           <p:cNvPr id="17" name="Text 13"/>
           <p:cNvSpPr/>
           <p:nvPr/>
@@ -23061,50 +22533,6 @@
       </p:sp>
       <p:sp>
         <p:nvSpPr>
-          <p:cNvPr id="30" name="Text 21"/>
-          <p:cNvSpPr/>
-          <p:nvPr/>
-        </p:nvSpPr>
-        <p:spPr>
-          <a:xfrm>
-            <a:off x="812800" y="6261100"/>
-            <a:ext cx="7848600" cy="215900"/>
-          </a:xfrm>
-          <a:prstGeom prst="rect">
-            <a:avLst/>
-          </a:prstGeom>
-          <a:noFill/>
-          <a:ln/>
-        </p:spPr>
-        <p:txBody>
-          <a:bodyPr wrap="square" lIns="0" tIns="0" rIns="0" bIns="0" rtlCol="0" anchor="t">
-            <a:normAutofit/>
-          </a:bodyPr>
-          <a:lstStyle/>
-          <a:p>
-            <a:pPr marL="0" indent="0" algn="l">
-              <a:lnSpc>
-                <a:spcPts val="1500"/>
-              </a:lnSpc>
-              <a:buNone/>
-            </a:pPr>
-            <a:r>
-              <a:rPr lang="en-US" sz="1200" dirty="0">
-                <a:solidFill>
-                  <a:srgbClr val="6E6E6C"/>
-                </a:solidFill>
-                <a:latin typeface="Roboto" pitchFamily="34" charset="0"/>
-                <a:ea typeface="Roboto" pitchFamily="34" charset="-122"/>
-                <a:cs typeface="Roboto" pitchFamily="34" charset="-120"/>
-              </a:rPr>
-              <a:t>Avances semana 9 · Privacidad diferencial cuántica</a:t>
-            </a:r>
-            <a:endParaRPr lang="en-US" sz="1200" dirty="0"/>
-          </a:p>
-        </p:txBody>
-      </p:sp>
-      <p:sp>
-        <p:nvSpPr>
           <p:cNvPr id="31" name="Text 22"/>
           <p:cNvSpPr/>
           <p:nvPr/>
@@ -24335,50 +23763,6 @@
       </p:sp>
       <p:sp>
         <p:nvSpPr>
-          <p:cNvPr id="28" name="Text 25"/>
-          <p:cNvSpPr/>
-          <p:nvPr/>
-        </p:nvSpPr>
-        <p:spPr>
-          <a:xfrm>
-            <a:off x="812800" y="6261100"/>
-            <a:ext cx="7848600" cy="215900"/>
-          </a:xfrm>
-          <a:prstGeom prst="rect">
-            <a:avLst/>
-          </a:prstGeom>
-          <a:noFill/>
-          <a:ln/>
-        </p:spPr>
-        <p:txBody>
-          <a:bodyPr wrap="square" lIns="0" tIns="0" rIns="0" bIns="0" rtlCol="0" anchor="t">
-            <a:normAutofit/>
-          </a:bodyPr>
-          <a:lstStyle/>
-          <a:p>
-            <a:pPr marL="0" indent="0" algn="l">
-              <a:lnSpc>
-                <a:spcPts val="1500"/>
-              </a:lnSpc>
-              <a:buNone/>
-            </a:pPr>
-            <a:r>
-              <a:rPr lang="en-US" sz="1200" dirty="0">
-                <a:solidFill>
-                  <a:srgbClr val="6E6E6C"/>
-                </a:solidFill>
-                <a:latin typeface="Roboto" pitchFamily="34" charset="0"/>
-                <a:ea typeface="Roboto" pitchFamily="34" charset="-122"/>
-                <a:cs typeface="Roboto" pitchFamily="34" charset="-120"/>
-              </a:rPr>
-              <a:t>Avances semana 9 · Privacidad diferencial cuántica</a:t>
-            </a:r>
-            <a:endParaRPr lang="en-US" sz="1200" dirty="0"/>
-          </a:p>
-        </p:txBody>
-      </p:sp>
-      <p:sp>
-        <p:nvSpPr>
           <p:cNvPr id="29" name="Text 26"/>
           <p:cNvSpPr/>
           <p:nvPr/>
@@ -25323,50 +24707,6 @@
       </p:sp>
       <p:sp>
         <p:nvSpPr>
-          <p:cNvPr id="24" name="Text 20"/>
-          <p:cNvSpPr/>
-          <p:nvPr/>
-        </p:nvSpPr>
-        <p:spPr>
-          <a:xfrm>
-            <a:off x="812800" y="6261100"/>
-            <a:ext cx="7848600" cy="215900"/>
-          </a:xfrm>
-          <a:prstGeom prst="rect">
-            <a:avLst/>
-          </a:prstGeom>
-          <a:noFill/>
-          <a:ln/>
-        </p:spPr>
-        <p:txBody>
-          <a:bodyPr wrap="square" lIns="0" tIns="0" rIns="0" bIns="0" rtlCol="0" anchor="t">
-            <a:normAutofit/>
-          </a:bodyPr>
-          <a:lstStyle/>
-          <a:p>
-            <a:pPr marL="0" indent="0" algn="l">
-              <a:lnSpc>
-                <a:spcPts val="1500"/>
-              </a:lnSpc>
-              <a:buNone/>
-            </a:pPr>
-            <a:r>
-              <a:rPr lang="en-US" sz="1200" dirty="0">
-                <a:solidFill>
-                  <a:srgbClr val="6E6E6C"/>
-                </a:solidFill>
-                <a:latin typeface="Roboto" pitchFamily="34" charset="0"/>
-                <a:ea typeface="Roboto" pitchFamily="34" charset="-122"/>
-                <a:cs typeface="Roboto" pitchFamily="34" charset="-120"/>
-              </a:rPr>
-              <a:t>Avances semana 9 · Privacidad diferencial cuántica</a:t>
-            </a:r>
-            <a:endParaRPr lang="en-US" sz="1200" dirty="0"/>
-          </a:p>
-        </p:txBody>
-      </p:sp>
-      <p:sp>
-        <p:nvSpPr>
           <p:cNvPr id="25" name="Text 21"/>
           <p:cNvSpPr/>
           <p:nvPr/>
@@ -25655,50 +24995,119 @@
           </a:p>
         </p:txBody>
       </p:sp>
-      <p:sp>
-        <p:nvSpPr>
-          <p:cNvPr id="8" name="Text 5"/>
-          <p:cNvSpPr/>
-          <p:nvPr/>
-        </p:nvSpPr>
-        <p:spPr>
-          <a:xfrm>
-            <a:off x="812800" y="1305520"/>
-            <a:ext cx="10883392" cy="322560"/>
-          </a:xfrm>
-          <a:prstGeom prst="rect">
-            <a:avLst/>
-          </a:prstGeom>
-          <a:noFill/>
-          <a:ln/>
-        </p:spPr>
-        <p:txBody>
-          <a:bodyPr wrap="square" lIns="0" tIns="0" rIns="0" bIns="0" rtlCol="0" anchor="t">
-            <a:normAutofit/>
-          </a:bodyPr>
-          <a:lstStyle/>
-          <a:p>
-            <a:pPr marL="0" indent="0" algn="l">
-              <a:lnSpc>
-                <a:spcPts val="2340"/>
-              </a:lnSpc>
-              <a:buNone/>
-            </a:pPr>
-            <a:r>
-              <a:rPr lang="en-US" sz="1800" dirty="0">
-                <a:solidFill>
-                  <a:srgbClr val="3C3C3B"/>
-                </a:solidFill>
-                <a:latin typeface="Roboto" pitchFamily="34" charset="0"/>
-                <a:ea typeface="Roboto" pitchFamily="34" charset="-122"/>
-                <a:cs typeface="Roboto" pitchFamily="34" charset="-120"/>
-              </a:rPr>
-              <a:t>Con d ≈ 1/n en C, d = 1 en L, (1 − p)/p = 1 y N = n:</a:t>
-            </a:r>
-            <a:endParaRPr lang="en-US" sz="1800" dirty="0"/>
-          </a:p>
-        </p:txBody>
-      </p:sp>
+      <mc:AlternateContent xmlns:mc="http://schemas.openxmlformats.org/markup-compatibility/2006">
+        <mc:Choice xmlns:a14="http://schemas.microsoft.com/office/drawing/2010/main" Requires="a14">
+          <p:sp>
+            <p:nvSpPr>
+              <p:cNvPr id="8" name="Text 5"/>
+              <p:cNvSpPr/>
+              <p:nvPr/>
+            </p:nvSpPr>
+            <p:spPr>
+              <a:xfrm>
+                <a:off x="812800" y="1305520"/>
+                <a:ext cx="10883392" cy="322560"/>
+              </a:xfrm>
+              <a:prstGeom prst="rect">
+                <a:avLst/>
+              </a:prstGeom>
+              <a:noFill/>
+              <a:ln/>
+            </p:spPr>
+            <p:txBody>
+              <a:bodyPr wrap="square" lIns="0" tIns="0" rIns="0" bIns="0" rtlCol="0" anchor="t">
+                <a:normAutofit/>
+              </a:bodyPr>
+              <a:lstStyle/>
+              <a:p>
+                <a:pPr marL="0" indent="0" algn="l">
+                  <a:lnSpc>
+                    <a:spcPts val="2340"/>
+                  </a:lnSpc>
+                  <a:buNone/>
+                </a:pPr>
+                <a:r>
+                  <a:rPr lang="en-US" sz="1800" dirty="0">
+                    <a:solidFill>
+                      <a:srgbClr val="3C3C3B"/>
+                    </a:solidFill>
+                    <a:latin typeface="Roboto" pitchFamily="34" charset="0"/>
+                    <a:ea typeface="Roboto" pitchFamily="34" charset="-122"/>
+                    <a:cs typeface="Roboto" pitchFamily="34" charset="-120"/>
+                  </a:rPr>
+                  <a:t>Con d ≈ 1/n en C, d </a:t>
+                </a:r>
+                <a14:m>
+                  <m:oMath xmlns:m="http://schemas.openxmlformats.org/officeDocument/2006/math">
+                    <m:r>
+                      <a:rPr lang="en-US" sz="1800" i="1" smtClean="0">
+                        <a:solidFill>
+                          <a:srgbClr val="3C3C3B"/>
+                        </a:solidFill>
+                        <a:latin typeface="Cambria Math" panose="02040503050406030204" pitchFamily="18" charset="0"/>
+                        <a:ea typeface="Cambria Math" panose="02040503050406030204" pitchFamily="18" charset="0"/>
+                        <a:cs typeface="Roboto" pitchFamily="34" charset="-120"/>
+                      </a:rPr>
+                      <m:t>≤</m:t>
+                    </m:r>
+                  </m:oMath>
+                </a14:m>
+                <a:r>
+                  <a:rPr lang="en-US" sz="1800" dirty="0">
+                    <a:solidFill>
+                      <a:srgbClr val="3C3C3B"/>
+                    </a:solidFill>
+                    <a:latin typeface="Roboto" pitchFamily="34" charset="0"/>
+                    <a:ea typeface="Roboto" pitchFamily="34" charset="-122"/>
+                    <a:cs typeface="Roboto" pitchFamily="34" charset="-120"/>
+                  </a:rPr>
+                  <a:t> 1 en L, (1 − p)/p = 1 y N = n:</a:t>
+                </a:r>
+                <a:endParaRPr lang="en-US" sz="1800" dirty="0"/>
+              </a:p>
+            </p:txBody>
+          </p:sp>
+        </mc:Choice>
+        <mc:Fallback>
+          <p:sp>
+            <p:nvSpPr>
+              <p:cNvPr id="8" name="Text 5"/>
+              <p:cNvSpPr>
+                <a:spLocks noRot="1" noChangeAspect="1" noMove="1" noResize="1" noEditPoints="1" noAdjustHandles="1" noChangeArrowheads="1" noChangeShapeType="1" noTextEdit="1"/>
+              </p:cNvSpPr>
+              <p:nvPr/>
+            </p:nvSpPr>
+            <p:spPr>
+              <a:xfrm>
+                <a:off x="812800" y="1305520"/>
+                <a:ext cx="10883392" cy="322560"/>
+              </a:xfrm>
+              <a:prstGeom prst="rect">
+                <a:avLst/>
+              </a:prstGeom>
+              <a:blipFill>
+                <a:blip r:embed="rId4"/>
+                <a:stretch>
+                  <a:fillRect l="-1281" t="-22222" b="-22222"/>
+                </a:stretch>
+              </a:blipFill>
+              <a:ln/>
+            </p:spPr>
+            <p:txBody>
+              <a:bodyPr/>
+              <a:lstStyle/>
+              <a:p>
+                <a:r>
+                  <a:rPr lang="en-CO">
+                    <a:noFill/>
+                  </a:rPr>
+                  <a:t> </a:t>
+                </a:r>
+              </a:p>
+            </p:txBody>
+          </p:sp>
+        </mc:Fallback>
+      </mc:AlternateContent>
       <p:sp>
         <p:nvSpPr>
           <p:cNvPr id="9" name="Shape 6"/>
@@ -25811,7 +25220,7 @@
           <p:nvPr/>
         </p:nvPicPr>
         <p:blipFill>
-          <a:blip r:embed="rId4"/>
+          <a:blip r:embed="rId5"/>
           <a:srcRect t="-158" b="-158"/>
           <a:stretch/>
         </p:blipFill>
@@ -25981,7 +25390,7 @@
           <p:nvPr/>
         </p:nvPicPr>
         <p:blipFill>
-          <a:blip r:embed="rId5"/>
+          <a:blip r:embed="rId6"/>
           <a:srcRect t="-430" b="-430"/>
           <a:stretch/>
         </p:blipFill>
@@ -27073,50 +26482,6 @@
       </p:sp>
       <p:sp>
         <p:nvSpPr>
-          <p:cNvPr id="20" name="Text 14"/>
-          <p:cNvSpPr/>
-          <p:nvPr/>
-        </p:nvSpPr>
-        <p:spPr>
-          <a:xfrm>
-            <a:off x="812800" y="6261100"/>
-            <a:ext cx="7848600" cy="215900"/>
-          </a:xfrm>
-          <a:prstGeom prst="rect">
-            <a:avLst/>
-          </a:prstGeom>
-          <a:noFill/>
-          <a:ln/>
-        </p:spPr>
-        <p:txBody>
-          <a:bodyPr wrap="square" lIns="0" tIns="0" rIns="0" bIns="0" rtlCol="0" anchor="t">
-            <a:normAutofit/>
-          </a:bodyPr>
-          <a:lstStyle/>
-          <a:p>
-            <a:pPr marL="0" indent="0" algn="l">
-              <a:lnSpc>
-                <a:spcPts val="1500"/>
-              </a:lnSpc>
-              <a:buNone/>
-            </a:pPr>
-            <a:r>
-              <a:rPr lang="en-US" sz="1200" dirty="0">
-                <a:solidFill>
-                  <a:srgbClr val="6E6E6C"/>
-                </a:solidFill>
-                <a:latin typeface="Roboto" pitchFamily="34" charset="0"/>
-                <a:ea typeface="Roboto" pitchFamily="34" charset="-122"/>
-                <a:cs typeface="Roboto" pitchFamily="34" charset="-120"/>
-              </a:rPr>
-              <a:t>Avances semana 9 · Privacidad diferencial cuántica</a:t>
-            </a:r>
-            <a:endParaRPr lang="en-US" sz="1200" dirty="0"/>
-          </a:p>
-        </p:txBody>
-      </p:sp>
-      <p:sp>
-        <p:nvSpPr>
           <p:cNvPr id="21" name="Text 15"/>
           <p:cNvSpPr/>
           <p:nvPr/>
@@ -27616,50 +26981,6 @@
               <a:t>Un algoritmo cuántico que necesite estimar algo con precisión también consume muchas copias, y paga N·ε.</a:t>
             </a:r>
             <a:endParaRPr lang="en-US" sz="1400" dirty="0"/>
-          </a:p>
-        </p:txBody>
-      </p:sp>
-      <p:sp>
-        <p:nvSpPr>
-          <p:cNvPr id="13" name="Text 10"/>
-          <p:cNvSpPr/>
-          <p:nvPr/>
-        </p:nvSpPr>
-        <p:spPr>
-          <a:xfrm>
-            <a:off x="812800" y="6261100"/>
-            <a:ext cx="7848600" cy="215900"/>
-          </a:xfrm>
-          <a:prstGeom prst="rect">
-            <a:avLst/>
-          </a:prstGeom>
-          <a:noFill/>
-          <a:ln/>
-        </p:spPr>
-        <p:txBody>
-          <a:bodyPr wrap="square" lIns="0" tIns="0" rIns="0" bIns="0" rtlCol="0" anchor="t">
-            <a:normAutofit/>
-          </a:bodyPr>
-          <a:lstStyle/>
-          <a:p>
-            <a:pPr marL="0" indent="0" algn="l">
-              <a:lnSpc>
-                <a:spcPts val="1500"/>
-              </a:lnSpc>
-              <a:buNone/>
-            </a:pPr>
-            <a:r>
-              <a:rPr lang="en-US" sz="1200" dirty="0">
-                <a:solidFill>
-                  <a:srgbClr val="9A9A96"/>
-                </a:solidFill>
-                <a:latin typeface="Roboto" pitchFamily="34" charset="0"/>
-                <a:ea typeface="Roboto" pitchFamily="34" charset="-122"/>
-                <a:cs typeface="Roboto" pitchFamily="34" charset="-120"/>
-              </a:rPr>
-              <a:t>Avances semana 9 · Privacidad diferencial cuántica</a:t>
-            </a:r>
-            <a:endParaRPr lang="en-US" sz="1200" dirty="0"/>
           </a:p>
         </p:txBody>
       </p:sp>
@@ -27782,7 +27103,7 @@
         </p:spPr>
         <p:txBody>
           <a:bodyPr wrap="square" lIns="0" tIns="0" rIns="0" bIns="0" rtlCol="0" anchor="t">
-            <a:normAutofit/>
+            <a:normAutofit fontScale="92500"/>
           </a:bodyPr>
           <a:lstStyle/>
           <a:p>
@@ -31102,50 +30423,6 @@
       </p:sp>
       <p:sp>
         <p:nvSpPr>
-          <p:cNvPr id="16" name="Text 12"/>
-          <p:cNvSpPr/>
-          <p:nvPr/>
-        </p:nvSpPr>
-        <p:spPr>
-          <a:xfrm>
-            <a:off x="812800" y="6261100"/>
-            <a:ext cx="7848600" cy="215900"/>
-          </a:xfrm>
-          <a:prstGeom prst="rect">
-            <a:avLst/>
-          </a:prstGeom>
-          <a:noFill/>
-          <a:ln/>
-        </p:spPr>
-        <p:txBody>
-          <a:bodyPr wrap="square" lIns="0" tIns="0" rIns="0" bIns="0" rtlCol="0" anchor="t">
-            <a:normAutofit/>
-          </a:bodyPr>
-          <a:lstStyle/>
-          <a:p>
-            <a:pPr marL="0" indent="0" algn="l">
-              <a:lnSpc>
-                <a:spcPts val="1500"/>
-              </a:lnSpc>
-              <a:buNone/>
-            </a:pPr>
-            <a:r>
-              <a:rPr lang="en-US" sz="1200" dirty="0">
-                <a:solidFill>
-                  <a:srgbClr val="6E6E6C"/>
-                </a:solidFill>
-                <a:latin typeface="Roboto" pitchFamily="34" charset="0"/>
-                <a:ea typeface="Roboto" pitchFamily="34" charset="-122"/>
-                <a:cs typeface="Roboto" pitchFamily="34" charset="-120"/>
-              </a:rPr>
-              <a:t>Avances semana 9 · Privacidad diferencial cuántica</a:t>
-            </a:r>
-            <a:endParaRPr lang="en-US" sz="1200" dirty="0"/>
-          </a:p>
-        </p:txBody>
-      </p:sp>
-      <p:sp>
-        <p:nvSpPr>
           <p:cNvPr id="17" name="Text 13"/>
           <p:cNvSpPr/>
           <p:nvPr/>
@@ -32214,50 +31491,6 @@
                 <a:cs typeface="Roboto" pitchFamily="34" charset="-120"/>
               </a:rPr>
               <a:t>K par: K/2 pasos de 2π/K dan exactamente π. K impar: el máximo es (K − 1)/K · 180°. Con K = 21 ya son 171.4° y el ε tiende a ln 3.</a:t>
-            </a:r>
-            <a:endParaRPr lang="en-US" sz="1200" dirty="0"/>
-          </a:p>
-        </p:txBody>
-      </p:sp>
-      <p:sp>
-        <p:nvSpPr>
-          <p:cNvPr id="30" name="Text 22"/>
-          <p:cNvSpPr/>
-          <p:nvPr/>
-        </p:nvSpPr>
-        <p:spPr>
-          <a:xfrm>
-            <a:off x="812800" y="6261100"/>
-            <a:ext cx="7848600" cy="215900"/>
-          </a:xfrm>
-          <a:prstGeom prst="rect">
-            <a:avLst/>
-          </a:prstGeom>
-          <a:noFill/>
-          <a:ln/>
-        </p:spPr>
-        <p:txBody>
-          <a:bodyPr wrap="square" lIns="0" tIns="0" rIns="0" bIns="0" rtlCol="0" anchor="t">
-            <a:normAutofit/>
-          </a:bodyPr>
-          <a:lstStyle/>
-          <a:p>
-            <a:pPr marL="0" indent="0" algn="l">
-              <a:lnSpc>
-                <a:spcPts val="1500"/>
-              </a:lnSpc>
-              <a:buNone/>
-            </a:pPr>
-            <a:r>
-              <a:rPr lang="en-US" sz="1200" dirty="0">
-                <a:solidFill>
-                  <a:srgbClr val="6E6E6C"/>
-                </a:solidFill>
-                <a:latin typeface="Roboto" pitchFamily="34" charset="0"/>
-                <a:ea typeface="Roboto" pitchFamily="34" charset="-122"/>
-                <a:cs typeface="Roboto" pitchFamily="34" charset="-120"/>
-              </a:rPr>
-              <a:t>Avances semana 9 · Privacidad diferencial cuántica</a:t>
             </a:r>
             <a:endParaRPr lang="en-US" sz="1200" dirty="0"/>
           </a:p>
@@ -32382,7 +31615,7 @@
         </p:spPr>
         <p:txBody>
           <a:bodyPr wrap="square" lIns="0" tIns="0" rIns="0" bIns="0" rtlCol="0" anchor="t">
-            <a:normAutofit/>
+            <a:normAutofit fontScale="92500"/>
           </a:bodyPr>
           <a:lstStyle/>
           <a:p>
@@ -33630,50 +32863,6 @@
       </p:sp>
       <p:sp>
         <p:nvSpPr>
-          <p:cNvPr id="26" name="Text 21"/>
-          <p:cNvSpPr/>
-          <p:nvPr/>
-        </p:nvSpPr>
-        <p:spPr>
-          <a:xfrm>
-            <a:off x="812800" y="6261100"/>
-            <a:ext cx="7848600" cy="215900"/>
-          </a:xfrm>
-          <a:prstGeom prst="rect">
-            <a:avLst/>
-          </a:prstGeom>
-          <a:noFill/>
-          <a:ln/>
-        </p:spPr>
-        <p:txBody>
-          <a:bodyPr wrap="square" lIns="0" tIns="0" rIns="0" bIns="0" rtlCol="0" anchor="t">
-            <a:normAutofit/>
-          </a:bodyPr>
-          <a:lstStyle/>
-          <a:p>
-            <a:pPr marL="0" indent="0" algn="l">
-              <a:lnSpc>
-                <a:spcPts val="1500"/>
-              </a:lnSpc>
-              <a:buNone/>
-            </a:pPr>
-            <a:r>
-              <a:rPr lang="en-US" sz="1200" dirty="0">
-                <a:solidFill>
-                  <a:srgbClr val="6E6E6C"/>
-                </a:solidFill>
-                <a:latin typeface="Roboto" pitchFamily="34" charset="0"/>
-                <a:ea typeface="Roboto" pitchFamily="34" charset="-122"/>
-                <a:cs typeface="Roboto" pitchFamily="34" charset="-120"/>
-              </a:rPr>
-              <a:t>Avances semana 9 · Privacidad diferencial cuántica</a:t>
-            </a:r>
-            <a:endParaRPr lang="en-US" sz="1200" dirty="0"/>
-          </a:p>
-        </p:txBody>
-      </p:sp>
-      <p:sp>
-        <p:nvSpPr>
           <p:cNvPr id="27" name="Text 22"/>
           <p:cNvSpPr/>
           <p:nvPr/>
@@ -34124,50 +33313,164 @@
           </a:p>
         </p:txBody>
       </p:sp>
-      <p:sp>
-        <p:nvSpPr>
-          <p:cNvPr id="11" name="Text 8"/>
-          <p:cNvSpPr/>
-          <p:nvPr/>
-        </p:nvSpPr>
-        <p:spPr>
-          <a:xfrm>
-            <a:off x="1219200" y="2209701"/>
-            <a:ext cx="5650992" cy="274241"/>
-          </a:xfrm>
-          <a:prstGeom prst="rect">
-            <a:avLst/>
-          </a:prstGeom>
-          <a:noFill/>
-          <a:ln/>
-        </p:spPr>
-        <p:txBody>
-          <a:bodyPr wrap="square" lIns="0" tIns="0" rIns="0" bIns="0" rtlCol="0" anchor="t">
-            <a:normAutofit/>
-          </a:bodyPr>
-          <a:lstStyle/>
-          <a:p>
-            <a:pPr marL="0" indent="0" algn="l">
-              <a:lnSpc>
-                <a:spcPts val="1960"/>
-              </a:lnSpc>
-              <a:buNone/>
-            </a:pPr>
-            <a:r>
-              <a:rPr lang="en-US" sz="1400" dirty="0">
-                <a:solidFill>
-                  <a:srgbClr val="3C3C3B"/>
-                </a:solidFill>
-                <a:latin typeface="Roboto" pitchFamily="34" charset="0"/>
-                <a:ea typeface="Roboto" pitchFamily="34" charset="-122"/>
-                <a:cs typeface="Roboto" pitchFamily="34" charset="-120"/>
-              </a:rPr>
-              <a:t>1 qubit por persona: H + RZ(2πk/4).</a:t>
-            </a:r>
-            <a:endParaRPr lang="en-US" sz="1400" dirty="0"/>
-          </a:p>
-        </p:txBody>
-      </p:sp>
+      <mc:AlternateContent xmlns:mc="http://schemas.openxmlformats.org/markup-compatibility/2006">
+        <mc:Choice xmlns:a14="http://schemas.microsoft.com/office/drawing/2010/main" Requires="a14">
+          <p:sp>
+            <p:nvSpPr>
+              <p:cNvPr id="11" name="Text 8"/>
+              <p:cNvSpPr/>
+              <p:nvPr/>
+            </p:nvSpPr>
+            <p:spPr>
+              <a:xfrm>
+                <a:off x="1219200" y="2209701"/>
+                <a:ext cx="5650992" cy="274241"/>
+              </a:xfrm>
+              <a:prstGeom prst="rect">
+                <a:avLst/>
+              </a:prstGeom>
+              <a:noFill/>
+              <a:ln/>
+            </p:spPr>
+            <p:txBody>
+              <a:bodyPr wrap="square" lIns="0" tIns="0" rIns="0" bIns="0" rtlCol="0" anchor="t">
+                <a:normAutofit/>
+              </a:bodyPr>
+              <a:lstStyle/>
+              <a:p>
+                <a:pPr>
+                  <a:lnSpc>
+                    <a:spcPts val="1960"/>
+                  </a:lnSpc>
+                </a:pPr>
+                <a:r>
+                  <a:rPr lang="en-US" sz="1400" dirty="0">
+                    <a:solidFill>
+                      <a:srgbClr val="3C3C3B"/>
+                    </a:solidFill>
+                    <a:latin typeface="Roboto" pitchFamily="34" charset="0"/>
+                    <a:ea typeface="Roboto" pitchFamily="34" charset="-122"/>
+                    <a:cs typeface="Roboto" pitchFamily="34" charset="-120"/>
+                  </a:rPr>
+                  <a:t>1 qubit por persona: H + RZ(</a:t>
+                </a:r>
+                <a14:m>
+                  <m:oMath xmlns:m="http://schemas.openxmlformats.org/officeDocument/2006/math">
+                    <m:f>
+                      <m:fPr>
+                        <m:ctrlPr>
+                          <a:rPr lang="en-US" sz="1400" i="1">
+                            <a:solidFill>
+                              <a:srgbClr val="3C3C3B"/>
+                            </a:solidFill>
+                            <a:latin typeface="Cambria Math" panose="02040503050406030204" pitchFamily="18" charset="0"/>
+                            <a:ea typeface="Roboto" pitchFamily="34" charset="-122"/>
+                          </a:rPr>
+                        </m:ctrlPr>
+                      </m:fPr>
+                      <m:num>
+                        <m:r>
+                          <a:rPr lang="es-419" sz="1400" i="1">
+                            <a:solidFill>
+                              <a:srgbClr val="3C3C3B"/>
+                            </a:solidFill>
+                            <a:latin typeface="Cambria Math" panose="02040503050406030204" pitchFamily="18" charset="0"/>
+                            <a:ea typeface="Roboto" pitchFamily="34" charset="-122"/>
+                          </a:rPr>
+                          <m:t>2</m:t>
+                        </m:r>
+                        <m:r>
+                          <a:rPr lang="es-419" sz="1400" i="1">
+                            <a:solidFill>
+                              <a:srgbClr val="3C3C3B"/>
+                            </a:solidFill>
+                            <a:latin typeface="Cambria Math" panose="02040503050406030204" pitchFamily="18" charset="0"/>
+                            <a:ea typeface="Cambria Math" panose="02040503050406030204" pitchFamily="18" charset="0"/>
+                          </a:rPr>
+                          <m:t>𝜋</m:t>
+                        </m:r>
+                        <m:r>
+                          <a:rPr lang="es-419" sz="1400" i="1">
+                            <a:solidFill>
+                              <a:srgbClr val="3C3C3B"/>
+                            </a:solidFill>
+                            <a:latin typeface="Cambria Math" panose="02040503050406030204" pitchFamily="18" charset="0"/>
+                            <a:ea typeface="Cambria Math" panose="02040503050406030204" pitchFamily="18" charset="0"/>
+                          </a:rPr>
+                          <m:t>𝑘</m:t>
+                        </m:r>
+                      </m:num>
+                      <m:den>
+                        <m:r>
+                          <a:rPr lang="es-419" sz="1400" b="0" i="1" smtClean="0">
+                            <a:solidFill>
+                              <a:srgbClr val="3C3C3B"/>
+                            </a:solidFill>
+                            <a:latin typeface="Cambria Math" panose="02040503050406030204" pitchFamily="18" charset="0"/>
+                            <a:ea typeface="Cambria Math" panose="02040503050406030204" pitchFamily="18" charset="0"/>
+                          </a:rPr>
+                          <m:t>4</m:t>
+                        </m:r>
+                      </m:den>
+                    </m:f>
+                  </m:oMath>
+                </a14:m>
+                <a:r>
+                  <a:rPr lang="en-US" sz="1400" dirty="0">
+                    <a:solidFill>
+                      <a:srgbClr val="3C3C3B"/>
+                    </a:solidFill>
+                    <a:latin typeface="Roboto" pitchFamily="34" charset="0"/>
+                    <a:ea typeface="Roboto" pitchFamily="34" charset="-122"/>
+                    <a:cs typeface="Roboto" pitchFamily="34" charset="-120"/>
+                  </a:rPr>
+                  <a:t>).</a:t>
+                </a:r>
+                <a:endParaRPr lang="en-US" sz="1400" dirty="0"/>
+              </a:p>
+            </p:txBody>
+          </p:sp>
+        </mc:Choice>
+        <mc:Fallback>
+          <p:sp>
+            <p:nvSpPr>
+              <p:cNvPr id="11" name="Text 8"/>
+              <p:cNvSpPr>
+                <a:spLocks noRot="1" noChangeAspect="1" noMove="1" noResize="1" noEditPoints="1" noAdjustHandles="1" noChangeArrowheads="1" noChangeShapeType="1" noTextEdit="1"/>
+              </p:cNvSpPr>
+              <p:nvPr/>
+            </p:nvSpPr>
+            <p:spPr>
+              <a:xfrm>
+                <a:off x="1219200" y="2209701"/>
+                <a:ext cx="5650992" cy="274241"/>
+              </a:xfrm>
+              <a:prstGeom prst="rect">
+                <a:avLst/>
+              </a:prstGeom>
+              <a:blipFill>
+                <a:blip r:embed="rId4"/>
+                <a:stretch>
+                  <a:fillRect l="-2022" t="-13043" b="-17391"/>
+                </a:stretch>
+              </a:blipFill>
+              <a:ln/>
+            </p:spPr>
+            <p:txBody>
+              <a:bodyPr/>
+              <a:lstStyle/>
+              <a:p>
+                <a:r>
+                  <a:rPr lang="en-CO">
+                    <a:noFill/>
+                  </a:rPr>
+                  <a:t> </a:t>
+                </a:r>
+              </a:p>
+            </p:txBody>
+          </p:sp>
+        </mc:Fallback>
+      </mc:AlternateContent>
       <p:sp>
         <p:nvSpPr>
           <p:cNvPr id="12" name="Text 9"/>
@@ -34413,7 +33716,7 @@
           <p:nvPr/>
         </p:nvPicPr>
         <p:blipFill>
-          <a:blip r:embed="rId4"/>
+          <a:blip r:embed="rId5"/>
           <a:srcRect t="-50" b="-50"/>
           <a:stretch/>
         </p:blipFill>
@@ -34753,7 +34056,7 @@
                 <a:ea typeface="DM Sans" pitchFamily="34" charset="-122"/>
                 <a:cs typeface="DM Sans" pitchFamily="34" charset="-120"/>
               </a:rPr>
-              <a:t>{0, ½, 1}</a:t>
+              <a:t>{0, 0.5, 1}</a:t>
             </a:r>
             <a:endParaRPr lang="en-US" sz="1400" dirty="0"/>
           </a:p>
@@ -35034,50 +34337,6 @@
                 <a:cs typeface="Roboto" pitchFamily="34" charset="-120"/>
               </a:rPr>
               <a:t>Archivo: Experiment/tests/DequantCollateral.py</a:t>
-            </a:r>
-            <a:endParaRPr lang="en-US" sz="1200" dirty="0"/>
-          </a:p>
-        </p:txBody>
-      </p:sp>
-      <p:sp>
-        <p:nvSpPr>
-          <p:cNvPr id="30" name="Text 26"/>
-          <p:cNvSpPr/>
-          <p:nvPr/>
-        </p:nvSpPr>
-        <p:spPr>
-          <a:xfrm>
-            <a:off x="812800" y="6261100"/>
-            <a:ext cx="7848600" cy="215900"/>
-          </a:xfrm>
-          <a:prstGeom prst="rect">
-            <a:avLst/>
-          </a:prstGeom>
-          <a:noFill/>
-          <a:ln/>
-        </p:spPr>
-        <p:txBody>
-          <a:bodyPr wrap="square" lIns="0" tIns="0" rIns="0" bIns="0" rtlCol="0" anchor="t">
-            <a:normAutofit/>
-          </a:bodyPr>
-          <a:lstStyle/>
-          <a:p>
-            <a:pPr marL="0" indent="0" algn="l">
-              <a:lnSpc>
-                <a:spcPts val="1500"/>
-              </a:lnSpc>
-              <a:buNone/>
-            </a:pPr>
-            <a:r>
-              <a:rPr lang="en-US" sz="1200" dirty="0">
-                <a:solidFill>
-                  <a:srgbClr val="6E6E6C"/>
-                </a:solidFill>
-                <a:latin typeface="Roboto" pitchFamily="34" charset="0"/>
-                <a:ea typeface="Roboto" pitchFamily="34" charset="-122"/>
-                <a:cs typeface="Roboto" pitchFamily="34" charset="-120"/>
-              </a:rPr>
-              <a:t>Avances semana 9 · Privacidad diferencial cuántica</a:t>
             </a:r>
             <a:endParaRPr lang="en-US" sz="1200" dirty="0"/>
           </a:p>
@@ -35433,7 +34692,7 @@
         </p:nvGraphicFramePr>
         <p:xfrm>
           <a:off x="825500" y="1818580"/>
-          <a:ext cx="6210300" cy="2514898"/>
+          <a:ext cx="6210300" cy="2514897"/>
         </p:xfrm>
         <a:graphic>
           <a:graphicData uri="http://schemas.openxmlformats.org/drawingml/2006/table">
@@ -37339,50 +36598,6 @@
       </p:pic>
       <p:sp>
         <p:nvSpPr>
-          <p:cNvPr id="18" name="Text 12"/>
-          <p:cNvSpPr/>
-          <p:nvPr/>
-        </p:nvSpPr>
-        <p:spPr>
-          <a:xfrm>
-            <a:off x="812800" y="6261100"/>
-            <a:ext cx="7848600" cy="215900"/>
-          </a:xfrm>
-          <a:prstGeom prst="rect">
-            <a:avLst/>
-          </a:prstGeom>
-          <a:noFill/>
-          <a:ln/>
-        </p:spPr>
-        <p:txBody>
-          <a:bodyPr wrap="square" lIns="0" tIns="0" rIns="0" bIns="0" rtlCol="0" anchor="t">
-            <a:normAutofit/>
-          </a:bodyPr>
-          <a:lstStyle/>
-          <a:p>
-            <a:pPr marL="0" indent="0" algn="l">
-              <a:lnSpc>
-                <a:spcPts val="1500"/>
-              </a:lnSpc>
-              <a:buNone/>
-            </a:pPr>
-            <a:r>
-              <a:rPr lang="en-US" sz="1200" dirty="0">
-                <a:solidFill>
-                  <a:srgbClr val="6E6E6C"/>
-                </a:solidFill>
-                <a:latin typeface="Roboto" pitchFamily="34" charset="0"/>
-                <a:ea typeface="Roboto" pitchFamily="34" charset="-122"/>
-                <a:cs typeface="Roboto" pitchFamily="34" charset="-120"/>
-              </a:rPr>
-              <a:t>Avances semana 9 · Privacidad diferencial cuántica</a:t>
-            </a:r>
-            <a:endParaRPr lang="en-US" sz="1200" dirty="0"/>
-          </a:p>
-        </p:txBody>
-      </p:sp>
-      <p:sp>
-        <p:nvSpPr>
           <p:cNvPr id="19" name="Text 13"/>
           <p:cNvSpPr/>
           <p:nvPr/>
@@ -37673,40 +36888,6 @@
       </p:sp>
       <p:sp>
         <p:nvSpPr>
-          <p:cNvPr id="8" name="Shape 5"/>
-          <p:cNvSpPr/>
-          <p:nvPr/>
-        </p:nvSpPr>
-        <p:spPr>
-          <a:xfrm>
-            <a:off x="819150" y="1464270"/>
-            <a:ext cx="6565900" cy="3644900"/>
-          </a:xfrm>
-          <a:prstGeom prst="roundRect">
-            <a:avLst>
-              <a:gd name="adj" fmla="val 1916"/>
-            </a:avLst>
-          </a:prstGeom>
-          <a:solidFill>
-            <a:srgbClr val="F4F4F2"/>
-          </a:solidFill>
-          <a:ln w="12700">
-            <a:solidFill>
-              <a:srgbClr val="B9B9B5"/>
-            </a:solidFill>
-            <a:prstDash val="dash"/>
-          </a:ln>
-        </p:spPr>
-        <p:txBody>
-          <a:bodyPr/>
-          <a:lstStyle/>
-          <a:p>
-            <a:endParaRPr lang="en-CO"/>
-          </a:p>
-        </p:txBody>
-      </p:sp>
-      <p:sp>
-        <p:nvSpPr>
           <p:cNvPr id="9" name="Text 6"/>
           <p:cNvSpPr/>
           <p:nvPr/>
@@ -38133,92 +37314,78 @@
       </p:sp>
       <p:sp>
         <p:nvSpPr>
-          <p:cNvPr id="19" name="Text 16"/>
-          <p:cNvSpPr/>
-          <p:nvPr/>
-        </p:nvSpPr>
-        <p:spPr>
-          <a:xfrm>
-            <a:off x="812800" y="6261100"/>
-            <a:ext cx="7848600" cy="215900"/>
-          </a:xfrm>
-          <a:prstGeom prst="rect">
-            <a:avLst/>
-          </a:prstGeom>
-          <a:noFill/>
-          <a:ln/>
-        </p:spPr>
-        <p:txBody>
-          <a:bodyPr wrap="square" lIns="0" tIns="0" rIns="0" bIns="0" rtlCol="0" anchor="t">
-            <a:normAutofit/>
-          </a:bodyPr>
-          <a:lstStyle/>
-          <a:p>
-            <a:pPr marL="0" indent="0" algn="l">
+          <p:cNvPr id="20" name="Text 17"/>
+          <p:cNvSpPr/>
+          <p:nvPr/>
+        </p:nvSpPr>
+        <p:spPr>
+          <a:xfrm>
+            <a:off x="10566400" y="6261100"/>
+            <a:ext cx="812800" cy="215900"/>
+          </a:xfrm>
+          <a:prstGeom prst="rect">
+            <a:avLst/>
+          </a:prstGeom>
+          <a:noFill/>
+          <a:ln/>
+        </p:spPr>
+        <p:txBody>
+          <a:bodyPr wrap="square" lIns="0" tIns="0" rIns="0" bIns="0" rtlCol="0" anchor="t">
+            <a:normAutofit/>
+          </a:bodyPr>
+          <a:lstStyle/>
+          <a:p>
+            <a:pPr marL="0" indent="0" algn="r">
               <a:lnSpc>
                 <a:spcPts val="1500"/>
               </a:lnSpc>
               <a:buNone/>
             </a:pPr>
             <a:r>
-              <a:rPr lang="en-US" sz="1200" dirty="0">
-                <a:solidFill>
-                  <a:srgbClr val="6E6E6C"/>
+              <a:rPr lang="en-US" sz="1200" b="1" dirty="0">
+                <a:solidFill>
+                  <a:srgbClr val="1D1D1B"/>
                 </a:solidFill>
                 <a:latin typeface="Roboto" pitchFamily="34" charset="0"/>
                 <a:ea typeface="Roboto" pitchFamily="34" charset="-122"/>
                 <a:cs typeface="Roboto" pitchFamily="34" charset="-120"/>
               </a:rPr>
-              <a:t>Avances semana 9 · Privacidad diferencial cuántica</a:t>
+              <a:t>33</a:t>
             </a:r>
             <a:endParaRPr lang="en-US" sz="1200" dirty="0"/>
           </a:p>
         </p:txBody>
       </p:sp>
-      <p:sp>
-        <p:nvSpPr>
-          <p:cNvPr id="20" name="Text 17"/>
-          <p:cNvSpPr/>
-          <p:nvPr/>
-        </p:nvSpPr>
-        <p:spPr>
-          <a:xfrm>
-            <a:off x="10566400" y="6261100"/>
-            <a:ext cx="812800" cy="215900"/>
-          </a:xfrm>
-          <a:prstGeom prst="rect">
-            <a:avLst/>
-          </a:prstGeom>
-          <a:noFill/>
-          <a:ln/>
-        </p:spPr>
-        <p:txBody>
-          <a:bodyPr wrap="square" lIns="0" tIns="0" rIns="0" bIns="0" rtlCol="0" anchor="t">
-            <a:normAutofit/>
-          </a:bodyPr>
-          <a:lstStyle/>
-          <a:p>
-            <a:pPr marL="0" indent="0" algn="r">
-              <a:lnSpc>
-                <a:spcPts val="1500"/>
-              </a:lnSpc>
-              <a:buNone/>
-            </a:pPr>
-            <a:r>
-              <a:rPr lang="en-US" sz="1200" b="1" dirty="0">
-                <a:solidFill>
-                  <a:srgbClr val="1D1D1B"/>
-                </a:solidFill>
-                <a:latin typeface="Roboto" pitchFamily="34" charset="0"/>
-                <a:ea typeface="Roboto" pitchFamily="34" charset="-122"/>
-                <a:cs typeface="Roboto" pitchFamily="34" charset="-120"/>
-              </a:rPr>
-              <a:t>33</a:t>
-            </a:r>
-            <a:endParaRPr lang="en-US" sz="1200" dirty="0"/>
-          </a:p>
-        </p:txBody>
-      </p:sp>
+      <p:pic>
+        <p:nvPicPr>
+          <p:cNvPr id="22" name="Picture 21" descr="A graph of a number of numbers&#10;&#10;AI-generated content may be incorrect.">
+            <a:extLst>
+              <a:ext uri="{FF2B5EF4-FFF2-40B4-BE49-F238E27FC236}">
+                <a16:creationId xmlns:a16="http://schemas.microsoft.com/office/drawing/2014/main" id="{EFFF2B44-0ADE-0BB0-DD60-08037135F239}"/>
+              </a:ext>
+            </a:extLst>
+          </p:cNvPr>
+          <p:cNvPicPr>
+            <a:picLocks noChangeAspect="1"/>
+          </p:cNvPicPr>
+          <p:nvPr/>
+        </p:nvPicPr>
+        <p:blipFill>
+          <a:blip r:embed="rId4"/>
+          <a:stretch>
+            <a:fillRect/>
+          </a:stretch>
+        </p:blipFill>
+        <p:spPr>
+          <a:xfrm>
+            <a:off x="1703020" y="1327390"/>
+            <a:ext cx="5021679" cy="3766259"/>
+          </a:xfrm>
+          <a:prstGeom prst="rect">
+            <a:avLst/>
+          </a:prstGeom>
+        </p:spPr>
+      </p:pic>
     </p:spTree>
   </p:cSld>
   <p:clrMapOvr>
@@ -38294,7 +37461,7 @@
         </p:spPr>
         <p:txBody>
           <a:bodyPr wrap="square" lIns="0" tIns="0" rIns="0" bIns="0" rtlCol="0" anchor="t">
-            <a:normAutofit/>
+            <a:normAutofit fontScale="92500"/>
           </a:bodyPr>
           <a:lstStyle/>
           <a:p>
@@ -39582,50 +38749,6 @@
       </p:sp>
       <p:sp>
         <p:nvSpPr>
-          <p:cNvPr id="26" name="Text 23"/>
-          <p:cNvSpPr/>
-          <p:nvPr/>
-        </p:nvSpPr>
-        <p:spPr>
-          <a:xfrm>
-            <a:off x="812800" y="6261100"/>
-            <a:ext cx="7848600" cy="215900"/>
-          </a:xfrm>
-          <a:prstGeom prst="rect">
-            <a:avLst/>
-          </a:prstGeom>
-          <a:noFill/>
-          <a:ln/>
-        </p:spPr>
-        <p:txBody>
-          <a:bodyPr wrap="square" lIns="0" tIns="0" rIns="0" bIns="0" rtlCol="0" anchor="t">
-            <a:normAutofit/>
-          </a:bodyPr>
-          <a:lstStyle/>
-          <a:p>
-            <a:pPr marL="0" indent="0" algn="l">
-              <a:lnSpc>
-                <a:spcPts val="1500"/>
-              </a:lnSpc>
-              <a:buNone/>
-            </a:pPr>
-            <a:r>
-              <a:rPr lang="en-US" sz="1200" dirty="0">
-                <a:solidFill>
-                  <a:srgbClr val="6E6E6C"/>
-                </a:solidFill>
-                <a:latin typeface="Roboto" pitchFamily="34" charset="0"/>
-                <a:ea typeface="Roboto" pitchFamily="34" charset="-122"/>
-                <a:cs typeface="Roboto" pitchFamily="34" charset="-120"/>
-              </a:rPr>
-              <a:t>Avances semana 9 · Privacidad diferencial cuántica</a:t>
-            </a:r>
-            <a:endParaRPr lang="en-US" sz="1200" dirty="0"/>
-          </a:p>
-        </p:txBody>
-      </p:sp>
-      <p:sp>
-        <p:nvSpPr>
           <p:cNvPr id="27" name="Text 24"/>
           <p:cNvSpPr/>
           <p:nvPr/>
@@ -40634,50 +39757,6 @@
       </p:sp>
       <p:sp>
         <p:nvSpPr>
-          <p:cNvPr id="26" name="Text 20"/>
-          <p:cNvSpPr/>
-          <p:nvPr/>
-        </p:nvSpPr>
-        <p:spPr>
-          <a:xfrm>
-            <a:off x="812800" y="6261100"/>
-            <a:ext cx="7848600" cy="215900"/>
-          </a:xfrm>
-          <a:prstGeom prst="rect">
-            <a:avLst/>
-          </a:prstGeom>
-          <a:noFill/>
-          <a:ln/>
-        </p:spPr>
-        <p:txBody>
-          <a:bodyPr wrap="square" lIns="0" tIns="0" rIns="0" bIns="0" rtlCol="0" anchor="t">
-            <a:normAutofit/>
-          </a:bodyPr>
-          <a:lstStyle/>
-          <a:p>
-            <a:pPr marL="0" indent="0" algn="l">
-              <a:lnSpc>
-                <a:spcPts val="1500"/>
-              </a:lnSpc>
-              <a:buNone/>
-            </a:pPr>
-            <a:r>
-              <a:rPr lang="en-US" sz="1200" dirty="0">
-                <a:solidFill>
-                  <a:srgbClr val="6E6E6C"/>
-                </a:solidFill>
-                <a:latin typeface="Roboto" pitchFamily="34" charset="0"/>
-                <a:ea typeface="Roboto" pitchFamily="34" charset="-122"/>
-                <a:cs typeface="Roboto" pitchFamily="34" charset="-120"/>
-              </a:rPr>
-              <a:t>Avances semana 9 · Privacidad diferencial cuántica</a:t>
-            </a:r>
-            <a:endParaRPr lang="en-US" sz="1200" dirty="0"/>
-          </a:p>
-        </p:txBody>
-      </p:sp>
-      <p:sp>
-        <p:nvSpPr>
           <p:cNvPr id="27" name="Text 21"/>
           <p:cNvSpPr/>
           <p:nvPr/>
@@ -41490,50 +40569,6 @@
       </p:sp>
       <p:sp>
         <p:nvSpPr>
-          <p:cNvPr id="21" name="Text 18"/>
-          <p:cNvSpPr/>
-          <p:nvPr/>
-        </p:nvSpPr>
-        <p:spPr>
-          <a:xfrm>
-            <a:off x="812800" y="6261100"/>
-            <a:ext cx="7848600" cy="215900"/>
-          </a:xfrm>
-          <a:prstGeom prst="rect">
-            <a:avLst/>
-          </a:prstGeom>
-          <a:noFill/>
-          <a:ln/>
-        </p:spPr>
-        <p:txBody>
-          <a:bodyPr wrap="square" lIns="0" tIns="0" rIns="0" bIns="0" rtlCol="0" anchor="t">
-            <a:normAutofit/>
-          </a:bodyPr>
-          <a:lstStyle/>
-          <a:p>
-            <a:pPr marL="0" indent="0" algn="l">
-              <a:lnSpc>
-                <a:spcPts val="1500"/>
-              </a:lnSpc>
-              <a:buNone/>
-            </a:pPr>
-            <a:r>
-              <a:rPr lang="en-US" sz="1200" dirty="0">
-                <a:solidFill>
-                  <a:srgbClr val="6E6E6C"/>
-                </a:solidFill>
-                <a:latin typeface="Roboto" pitchFamily="34" charset="0"/>
-                <a:ea typeface="Roboto" pitchFamily="34" charset="-122"/>
-                <a:cs typeface="Roboto" pitchFamily="34" charset="-120"/>
-              </a:rPr>
-              <a:t>Avances semana 9 · Privacidad diferencial cuántica</a:t>
-            </a:r>
-            <a:endParaRPr lang="en-US" sz="1200" dirty="0"/>
-          </a:p>
-        </p:txBody>
-      </p:sp>
-      <p:sp>
-        <p:nvSpPr>
           <p:cNvPr id="22" name="Text 19"/>
           <p:cNvSpPr/>
           <p:nvPr/>
@@ -41838,7 +40873,7 @@
         </p:nvGraphicFramePr>
         <p:xfrm>
           <a:off x="825500" y="1394420"/>
-          <a:ext cx="10553700" cy="3054648"/>
+          <a:ext cx="10553700" cy="3054649"/>
         </p:xfrm>
         <a:graphic>
           <a:graphicData uri="http://schemas.openxmlformats.org/drawingml/2006/table">
@@ -42818,50 +41853,6 @@
       </p:sp>
       <p:sp>
         <p:nvSpPr>
-          <p:cNvPr id="11" name="Text 7"/>
-          <p:cNvSpPr/>
-          <p:nvPr/>
-        </p:nvSpPr>
-        <p:spPr>
-          <a:xfrm>
-            <a:off x="812800" y="6261100"/>
-            <a:ext cx="7848600" cy="215900"/>
-          </a:xfrm>
-          <a:prstGeom prst="rect">
-            <a:avLst/>
-          </a:prstGeom>
-          <a:noFill/>
-          <a:ln/>
-        </p:spPr>
-        <p:txBody>
-          <a:bodyPr wrap="square" lIns="0" tIns="0" rIns="0" bIns="0" rtlCol="0" anchor="t">
-            <a:normAutofit/>
-          </a:bodyPr>
-          <a:lstStyle/>
-          <a:p>
-            <a:pPr marL="0" indent="0" algn="l">
-              <a:lnSpc>
-                <a:spcPts val="1500"/>
-              </a:lnSpc>
-              <a:buNone/>
-            </a:pPr>
-            <a:r>
-              <a:rPr lang="en-US" sz="1200" dirty="0">
-                <a:solidFill>
-                  <a:srgbClr val="6E6E6C"/>
-                </a:solidFill>
-                <a:latin typeface="Roboto" pitchFamily="34" charset="0"/>
-                <a:ea typeface="Roboto" pitchFamily="34" charset="-122"/>
-                <a:cs typeface="Roboto" pitchFamily="34" charset="-120"/>
-              </a:rPr>
-              <a:t>Avances semana 9 · Privacidad diferencial cuántica</a:t>
-            </a:r>
-            <a:endParaRPr lang="en-US" sz="1200" dirty="0"/>
-          </a:p>
-        </p:txBody>
-      </p:sp>
-      <p:sp>
-        <p:nvSpPr>
           <p:cNvPr id="12" name="Text 8"/>
           <p:cNvSpPr/>
           <p:nvPr/>
@@ -43492,7 +42483,7 @@
                 <a:ea typeface="Roboto" pitchFamily="34" charset="-122"/>
                 <a:cs typeface="Roboto" pitchFamily="34" charset="-120"/>
               </a:rPr>
-              <a:t>: RY(θ) medido en Z da sin²(θ/2), no el valor original.</a:t>
+              <a:t>: RY(θ) medido en Z da sin²(θ/2), no el valor original. </a:t>
             </a:r>
             <a:endParaRPr lang="en-US" sz="1400" dirty="0"/>
           </a:p>
@@ -43500,14 +42491,14 @@
       </p:sp>
       <p:sp>
         <p:nvSpPr>
-          <p:cNvPr id="16" name="Shape 13"/>
+          <p:cNvPr id="20" name="Shape 17"/>
           <p:cNvSpPr/>
           <p:nvPr/>
         </p:nvSpPr>
         <p:spPr>
           <a:xfrm>
             <a:off x="812800" y="3126383"/>
-            <a:ext cx="5207000" cy="1241822"/>
+            <a:ext cx="10566400" cy="1241822"/>
           </a:xfrm>
           <a:prstGeom prst="roundRect">
             <a:avLst>
@@ -43529,7 +42520,7 @@
       </p:sp>
       <p:sp>
         <p:nvSpPr>
-          <p:cNvPr id="17" name="Text 14"/>
+          <p:cNvPr id="21" name="Text 18"/>
           <p:cNvSpPr/>
           <p:nvPr/>
         </p:nvSpPr>
@@ -43559,6 +42550,48 @@
               <a:buNone/>
             </a:pPr>
             <a:r>
+              <a:rPr lang="en-US" b="1" dirty="0">
+                <a:solidFill>
+                  <a:srgbClr val="1D1D1B"/>
+                </a:solidFill>
+                <a:latin typeface="DM Sans" pitchFamily="34" charset="0"/>
+              </a:rPr>
+              <a:t>3</a:t>
+            </a:r>
+            <a:endParaRPr lang="en-US" sz="1800" dirty="0"/>
+          </a:p>
+        </p:txBody>
+      </p:sp>
+      <p:sp>
+        <p:nvSpPr>
+          <p:cNvPr id="22" name="Text 19"/>
+          <p:cNvSpPr/>
+          <p:nvPr/>
+        </p:nvSpPr>
+        <p:spPr>
+          <a:xfrm>
+            <a:off x="1625600" y="3411701"/>
+            <a:ext cx="4290568" cy="299641"/>
+          </a:xfrm>
+          <a:prstGeom prst="rect">
+            <a:avLst/>
+          </a:prstGeom>
+          <a:noFill/>
+          <a:ln/>
+        </p:spPr>
+        <p:txBody>
+          <a:bodyPr wrap="square" lIns="0" tIns="0" rIns="0" bIns="0" rtlCol="0" anchor="t">
+            <a:normAutofit/>
+          </a:bodyPr>
+          <a:lstStyle/>
+          <a:p>
+            <a:pPr marL="0" indent="0" algn="l">
+              <a:lnSpc>
+                <a:spcPts val="2160"/>
+              </a:lnSpc>
+              <a:buNone/>
+            </a:pPr>
+            <a:r>
               <a:rPr lang="en-US" sz="1800" b="1" dirty="0">
                 <a:solidFill>
                   <a:srgbClr val="1D1D1B"/>
@@ -43567,7 +42600,7 @@
                 <a:ea typeface="DM Sans" pitchFamily="34" charset="-122"/>
                 <a:cs typeface="DM Sans" pitchFamily="34" charset="-120"/>
               </a:rPr>
-              <a:t>3</a:t>
+              <a:t>Documentar</a:t>
             </a:r>
             <a:endParaRPr lang="en-US" sz="1800" dirty="0"/>
           </a:p>
@@ -43575,57 +42608,13 @@
       </p:sp>
       <p:sp>
         <p:nvSpPr>
-          <p:cNvPr id="18" name="Text 15"/>
-          <p:cNvSpPr/>
-          <p:nvPr/>
-        </p:nvSpPr>
-        <p:spPr>
-          <a:xfrm>
-            <a:off x="1625600" y="3329583"/>
-            <a:ext cx="4290568" cy="299641"/>
-          </a:xfrm>
-          <a:prstGeom prst="rect">
-            <a:avLst/>
-          </a:prstGeom>
-          <a:noFill/>
-          <a:ln/>
-        </p:spPr>
-        <p:txBody>
-          <a:bodyPr wrap="square" lIns="0" tIns="0" rIns="0" bIns="0" rtlCol="0" anchor="t">
-            <a:normAutofit/>
-          </a:bodyPr>
-          <a:lstStyle/>
-          <a:p>
-            <a:pPr marL="0" indent="0" algn="l">
-              <a:lnSpc>
-                <a:spcPts val="2160"/>
-              </a:lnSpc>
-              <a:buNone/>
-            </a:pPr>
-            <a:r>
-              <a:rPr lang="en-US" sz="1800" b="1" dirty="0">
-                <a:solidFill>
-                  <a:srgbClr val="1D1D1B"/>
-                </a:solidFill>
-                <a:latin typeface="DM Sans" pitchFamily="34" charset="0"/>
-                <a:ea typeface="DM Sans" pitchFamily="34" charset="-122"/>
-                <a:cs typeface="DM Sans" pitchFamily="34" charset="-120"/>
-              </a:rPr>
-              <a:t>ε del diseño L con 7 qubits</a:t>
-            </a:r>
-            <a:endParaRPr lang="en-US" sz="1800" dirty="0"/>
-          </a:p>
-        </p:txBody>
-      </p:sp>
-      <p:sp>
-        <p:nvSpPr>
-          <p:cNvPr id="19" name="Text 16"/>
-          <p:cNvSpPr/>
-          <p:nvPr/>
-        </p:nvSpPr>
-        <p:spPr>
-          <a:xfrm>
-            <a:off x="1625600" y="3667323"/>
+          <p:cNvPr id="23" name="Text 20"/>
+          <p:cNvSpPr/>
+          <p:nvPr/>
+        </p:nvSpPr>
+        <p:spPr>
+          <a:xfrm>
+            <a:off x="1625600" y="3711342"/>
             <a:ext cx="4290568" cy="523081"/>
           </a:xfrm>
           <a:prstGeom prst="rect">
@@ -43655,216 +42644,9 @@
                 <a:ea typeface="Roboto" pitchFamily="34" charset="-122"/>
                 <a:cs typeface="Roboto" pitchFamily="34" charset="-120"/>
               </a:rPr>
-              <a:t>Calcularlo experimentalmente con los 7 qubits completos; hoy solo se tiene la cota ln 129.</a:t>
+              <a:t>En la tesis, los dos modelos de publicación (conjunto y por columna) y por qué se usa cada uno.</a:t>
             </a:r>
             <a:endParaRPr lang="en-US" sz="1400" dirty="0"/>
-          </a:p>
-        </p:txBody>
-      </p:sp>
-      <p:sp>
-        <p:nvSpPr>
-          <p:cNvPr id="20" name="Shape 17"/>
-          <p:cNvSpPr/>
-          <p:nvPr/>
-        </p:nvSpPr>
-        <p:spPr>
-          <a:xfrm>
-            <a:off x="6172200" y="3126383"/>
-            <a:ext cx="5207000" cy="1241822"/>
-          </a:xfrm>
-          <a:prstGeom prst="roundRect">
-            <a:avLst>
-              <a:gd name="adj" fmla="val 8182"/>
-            </a:avLst>
-          </a:prstGeom>
-          <a:solidFill>
-            <a:srgbClr val="F4F4F2"/>
-          </a:solidFill>
-          <a:ln/>
-        </p:spPr>
-        <p:txBody>
-          <a:bodyPr/>
-          <a:lstStyle/>
-          <a:p>
-            <a:endParaRPr lang="en-CO"/>
-          </a:p>
-        </p:txBody>
-      </p:sp>
-      <p:sp>
-        <p:nvSpPr>
-          <p:cNvPr id="21" name="Text 18"/>
-          <p:cNvSpPr/>
-          <p:nvPr/>
-        </p:nvSpPr>
-        <p:spPr>
-          <a:xfrm>
-            <a:off x="6400800" y="3329583"/>
-            <a:ext cx="406400" cy="406400"/>
-          </a:xfrm>
-          <a:prstGeom prst="rect">
-            <a:avLst/>
-          </a:prstGeom>
-          <a:solidFill>
-            <a:srgbClr val="FFEE00"/>
-          </a:solidFill>
-          <a:ln/>
-        </p:spPr>
-        <p:txBody>
-          <a:bodyPr wrap="square" lIns="0" tIns="0" rIns="0" bIns="0" rtlCol="0" anchor="t">
-            <a:normAutofit/>
-          </a:bodyPr>
-          <a:lstStyle/>
-          <a:p>
-            <a:pPr marL="0" indent="0" algn="ctr">
-              <a:lnSpc>
-                <a:spcPts val="3204"/>
-              </a:lnSpc>
-              <a:buNone/>
-            </a:pPr>
-            <a:r>
-              <a:rPr lang="en-US" sz="1800" b="1" dirty="0">
-                <a:solidFill>
-                  <a:srgbClr val="1D1D1B"/>
-                </a:solidFill>
-                <a:latin typeface="DM Sans" pitchFamily="34" charset="0"/>
-                <a:ea typeface="DM Sans" pitchFamily="34" charset="-122"/>
-                <a:cs typeface="DM Sans" pitchFamily="34" charset="-120"/>
-              </a:rPr>
-              <a:t>4</a:t>
-            </a:r>
-            <a:endParaRPr lang="en-US" sz="1800" dirty="0"/>
-          </a:p>
-        </p:txBody>
-      </p:sp>
-      <p:sp>
-        <p:nvSpPr>
-          <p:cNvPr id="22" name="Text 19"/>
-          <p:cNvSpPr/>
-          <p:nvPr/>
-        </p:nvSpPr>
-        <p:spPr>
-          <a:xfrm>
-            <a:off x="6985000" y="3329583"/>
-            <a:ext cx="4290568" cy="299641"/>
-          </a:xfrm>
-          <a:prstGeom prst="rect">
-            <a:avLst/>
-          </a:prstGeom>
-          <a:noFill/>
-          <a:ln/>
-        </p:spPr>
-        <p:txBody>
-          <a:bodyPr wrap="square" lIns="0" tIns="0" rIns="0" bIns="0" rtlCol="0" anchor="t">
-            <a:normAutofit/>
-          </a:bodyPr>
-          <a:lstStyle/>
-          <a:p>
-            <a:pPr marL="0" indent="0" algn="l">
-              <a:lnSpc>
-                <a:spcPts val="2160"/>
-              </a:lnSpc>
-              <a:buNone/>
-            </a:pPr>
-            <a:r>
-              <a:rPr lang="en-US" sz="1800" b="1" dirty="0">
-                <a:solidFill>
-                  <a:srgbClr val="1D1D1B"/>
-                </a:solidFill>
-                <a:latin typeface="DM Sans" pitchFamily="34" charset="0"/>
-                <a:ea typeface="DM Sans" pitchFamily="34" charset="-122"/>
-                <a:cs typeface="DM Sans" pitchFamily="34" charset="-120"/>
-              </a:rPr>
-              <a:t>Documentar</a:t>
-            </a:r>
-            <a:endParaRPr lang="en-US" sz="1800" dirty="0"/>
-          </a:p>
-        </p:txBody>
-      </p:sp>
-      <p:sp>
-        <p:nvSpPr>
-          <p:cNvPr id="23" name="Text 20"/>
-          <p:cNvSpPr/>
-          <p:nvPr/>
-        </p:nvSpPr>
-        <p:spPr>
-          <a:xfrm>
-            <a:off x="6985000" y="3667323"/>
-            <a:ext cx="4290568" cy="523081"/>
-          </a:xfrm>
-          <a:prstGeom prst="rect">
-            <a:avLst/>
-          </a:prstGeom>
-          <a:noFill/>
-          <a:ln/>
-        </p:spPr>
-        <p:txBody>
-          <a:bodyPr wrap="square" lIns="0" tIns="0" rIns="0" bIns="0" rtlCol="0" anchor="t">
-            <a:normAutofit/>
-          </a:bodyPr>
-          <a:lstStyle/>
-          <a:p>
-            <a:pPr marL="0" indent="0" algn="l">
-              <a:lnSpc>
-                <a:spcPts val="1960"/>
-              </a:lnSpc>
-              <a:buNone/>
-            </a:pPr>
-            <a:r>
-              <a:rPr lang="en-US" sz="1400" dirty="0">
-                <a:solidFill>
-                  <a:srgbClr val="3C3C3B"/>
-                </a:solidFill>
-                <a:latin typeface="Roboto" pitchFamily="34" charset="0"/>
-                <a:ea typeface="Roboto" pitchFamily="34" charset="-122"/>
-                <a:cs typeface="Roboto" pitchFamily="34" charset="-120"/>
-              </a:rPr>
-              <a:t>En la tesis, los dos modelos de publicación (conjunto y por columna) y por qué se usa cada uno.</a:t>
-            </a:r>
-            <a:endParaRPr lang="en-US" sz="1400" dirty="0"/>
-          </a:p>
-        </p:txBody>
-      </p:sp>
-      <p:sp>
-        <p:nvSpPr>
-          <p:cNvPr id="24" name="Text 21"/>
-          <p:cNvSpPr/>
-          <p:nvPr/>
-        </p:nvSpPr>
-        <p:spPr>
-          <a:xfrm>
-            <a:off x="812800" y="6261100"/>
-            <a:ext cx="7848600" cy="215900"/>
-          </a:xfrm>
-          <a:prstGeom prst="rect">
-            <a:avLst/>
-          </a:prstGeom>
-          <a:noFill/>
-          <a:ln/>
-        </p:spPr>
-        <p:txBody>
-          <a:bodyPr wrap="square" lIns="0" tIns="0" rIns="0" bIns="0" rtlCol="0" anchor="t">
-            <a:normAutofit/>
-          </a:bodyPr>
-          <a:lstStyle/>
-          <a:p>
-            <a:pPr marL="0" indent="0" algn="l">
-              <a:lnSpc>
-                <a:spcPts val="1500"/>
-              </a:lnSpc>
-              <a:buNone/>
-            </a:pPr>
-            <a:r>
-              <a:rPr lang="en-US" sz="1200" dirty="0">
-                <a:solidFill>
-                  <a:srgbClr val="6E6E6C"/>
-                </a:solidFill>
-                <a:latin typeface="Roboto" pitchFamily="34" charset="0"/>
-                <a:ea typeface="Roboto" pitchFamily="34" charset="-122"/>
-                <a:cs typeface="Roboto" pitchFamily="34" charset="-120"/>
-              </a:rPr>
-              <a:t>Avances semana 9 · Privacidad diferencial cuántica</a:t>
-            </a:r>
-            <a:endParaRPr lang="en-US" sz="1200" dirty="0"/>
           </a:p>
         </p:txBody>
       </p:sp>
@@ -46485,50 +45267,6 @@
       </p:sp>
       <p:sp>
         <p:nvSpPr>
-          <p:cNvPr id="12" name="Text 8"/>
-          <p:cNvSpPr/>
-          <p:nvPr/>
-        </p:nvSpPr>
-        <p:spPr>
-          <a:xfrm>
-            <a:off x="812800" y="6261100"/>
-            <a:ext cx="7848600" cy="215900"/>
-          </a:xfrm>
-          <a:prstGeom prst="rect">
-            <a:avLst/>
-          </a:prstGeom>
-          <a:noFill/>
-          <a:ln/>
-        </p:spPr>
-        <p:txBody>
-          <a:bodyPr wrap="square" lIns="0" tIns="0" rIns="0" bIns="0" rtlCol="0" anchor="t">
-            <a:normAutofit/>
-          </a:bodyPr>
-          <a:lstStyle/>
-          <a:p>
-            <a:pPr marL="0" indent="0" algn="l">
-              <a:lnSpc>
-                <a:spcPts val="1500"/>
-              </a:lnSpc>
-              <a:buNone/>
-            </a:pPr>
-            <a:r>
-              <a:rPr lang="en-US" sz="1200" dirty="0">
-                <a:solidFill>
-                  <a:srgbClr val="6E6E6C"/>
-                </a:solidFill>
-                <a:latin typeface="Roboto" pitchFamily="34" charset="0"/>
-                <a:ea typeface="Roboto" pitchFamily="34" charset="-122"/>
-                <a:cs typeface="Roboto" pitchFamily="34" charset="-120"/>
-              </a:rPr>
-              <a:t>Avances semana 9 · Privacidad diferencial cuántica</a:t>
-            </a:r>
-            <a:endParaRPr lang="en-US" sz="1200" dirty="0"/>
-          </a:p>
-        </p:txBody>
-      </p:sp>
-      <p:sp>
-        <p:nvSpPr>
           <p:cNvPr id="13" name="Text 9"/>
           <p:cNvSpPr/>
           <p:nvPr/>
@@ -47578,92 +46316,78 @@
       </p:sp>
       <p:sp>
         <p:nvSpPr>
-          <p:cNvPr id="24" name="Text 19"/>
-          <p:cNvSpPr/>
-          <p:nvPr/>
-        </p:nvSpPr>
-        <p:spPr>
-          <a:xfrm>
-            <a:off x="812800" y="6261100"/>
-            <a:ext cx="7848600" cy="215900"/>
-          </a:xfrm>
-          <a:prstGeom prst="rect">
-            <a:avLst/>
-          </a:prstGeom>
-          <a:noFill/>
-          <a:ln/>
-        </p:spPr>
-        <p:txBody>
-          <a:bodyPr wrap="square" lIns="0" tIns="0" rIns="0" bIns="0" rtlCol="0" anchor="t">
-            <a:normAutofit/>
-          </a:bodyPr>
-          <a:lstStyle/>
-          <a:p>
-            <a:pPr marL="0" indent="0" algn="l">
+          <p:cNvPr id="25" name="Text 20"/>
+          <p:cNvSpPr/>
+          <p:nvPr/>
+        </p:nvSpPr>
+        <p:spPr>
+          <a:xfrm>
+            <a:off x="10566400" y="6261100"/>
+            <a:ext cx="812800" cy="215900"/>
+          </a:xfrm>
+          <a:prstGeom prst="rect">
+            <a:avLst/>
+          </a:prstGeom>
+          <a:noFill/>
+          <a:ln/>
+        </p:spPr>
+        <p:txBody>
+          <a:bodyPr wrap="square" lIns="0" tIns="0" rIns="0" bIns="0" rtlCol="0" anchor="t">
+            <a:normAutofit/>
+          </a:bodyPr>
+          <a:lstStyle/>
+          <a:p>
+            <a:pPr marL="0" indent="0" algn="r">
               <a:lnSpc>
                 <a:spcPts val="1500"/>
               </a:lnSpc>
               <a:buNone/>
             </a:pPr>
             <a:r>
-              <a:rPr lang="en-US" sz="1200" dirty="0">
-                <a:solidFill>
-                  <a:srgbClr val="6E6E6C"/>
+              <a:rPr lang="en-US" sz="1200" b="1" dirty="0">
+                <a:solidFill>
+                  <a:srgbClr val="1D1D1B"/>
                 </a:solidFill>
                 <a:latin typeface="Roboto" pitchFamily="34" charset="0"/>
                 <a:ea typeface="Roboto" pitchFamily="34" charset="-122"/>
                 <a:cs typeface="Roboto" pitchFamily="34" charset="-120"/>
               </a:rPr>
-              <a:t>Avances semana 9 · Privacidad diferencial cuántica</a:t>
+              <a:t>05</a:t>
             </a:r>
             <a:endParaRPr lang="en-US" sz="1200" dirty="0"/>
           </a:p>
         </p:txBody>
       </p:sp>
-      <p:sp>
-        <p:nvSpPr>
-          <p:cNvPr id="25" name="Text 20"/>
-          <p:cNvSpPr/>
-          <p:nvPr/>
-        </p:nvSpPr>
-        <p:spPr>
-          <a:xfrm>
-            <a:off x="10566400" y="6261100"/>
-            <a:ext cx="812800" cy="215900"/>
-          </a:xfrm>
-          <a:prstGeom prst="rect">
-            <a:avLst/>
-          </a:prstGeom>
-          <a:noFill/>
-          <a:ln/>
-        </p:spPr>
-        <p:txBody>
-          <a:bodyPr wrap="square" lIns="0" tIns="0" rIns="0" bIns="0" rtlCol="0" anchor="t">
-            <a:normAutofit/>
-          </a:bodyPr>
-          <a:lstStyle/>
-          <a:p>
-            <a:pPr marL="0" indent="0" algn="r">
-              <a:lnSpc>
-                <a:spcPts val="1500"/>
-              </a:lnSpc>
-              <a:buNone/>
-            </a:pPr>
-            <a:r>
-              <a:rPr lang="en-US" sz="1200" b="1" dirty="0">
-                <a:solidFill>
-                  <a:srgbClr val="1D1D1B"/>
-                </a:solidFill>
-                <a:latin typeface="Roboto" pitchFamily="34" charset="0"/>
-                <a:ea typeface="Roboto" pitchFamily="34" charset="-122"/>
-                <a:cs typeface="Roboto" pitchFamily="34" charset="-120"/>
-              </a:rPr>
-              <a:t>05</a:t>
-            </a:r>
-            <a:endParaRPr lang="en-US" sz="1200" dirty="0"/>
-          </a:p>
-        </p:txBody>
-      </p:sp>
+      <p:pic>
+        <p:nvPicPr>
+          <p:cNvPr id="24" name="Picture 23">
+            <a:extLst>
+              <a:ext uri="{FF2B5EF4-FFF2-40B4-BE49-F238E27FC236}">
+                <a16:creationId xmlns:a16="http://schemas.microsoft.com/office/drawing/2014/main" id="{6E05C371-5796-8BA4-32F5-AD6FA3EE6A27}"/>
+              </a:ext>
+            </a:extLst>
+          </p:cNvPr>
+          <p:cNvPicPr>
+            <a:picLocks noChangeAspect="1"/>
+          </p:cNvPicPr>
+          <p:nvPr/>
+        </p:nvPicPr>
+        <p:blipFill>
+          <a:blip r:embed="rId6"/>
+          <a:stretch>
+            <a:fillRect/>
+          </a:stretch>
+        </p:blipFill>
+        <p:spPr>
+          <a:xfrm>
+            <a:off x="3927729" y="1907994"/>
+            <a:ext cx="2906522" cy="672071"/>
+          </a:xfrm>
+          <a:prstGeom prst="rect">
+            <a:avLst/>
+          </a:prstGeom>
+        </p:spPr>
+      </p:pic>
     </p:spTree>
   </p:cSld>
   <p:clrMapOvr>
@@ -49080,50 +47804,6 @@
       </p:sp>
       <p:sp>
         <p:nvSpPr>
-          <p:cNvPr id="38" name="Text 35"/>
-          <p:cNvSpPr/>
-          <p:nvPr/>
-        </p:nvSpPr>
-        <p:spPr>
-          <a:xfrm>
-            <a:off x="812800" y="6261100"/>
-            <a:ext cx="7848600" cy="215900"/>
-          </a:xfrm>
-          <a:prstGeom prst="rect">
-            <a:avLst/>
-          </a:prstGeom>
-          <a:noFill/>
-          <a:ln/>
-        </p:spPr>
-        <p:txBody>
-          <a:bodyPr wrap="square" lIns="0" tIns="0" rIns="0" bIns="0" rtlCol="0" anchor="t">
-            <a:normAutofit/>
-          </a:bodyPr>
-          <a:lstStyle/>
-          <a:p>
-            <a:pPr marL="0" indent="0" algn="l">
-              <a:lnSpc>
-                <a:spcPts val="1500"/>
-              </a:lnSpc>
-              <a:buNone/>
-            </a:pPr>
-            <a:r>
-              <a:rPr lang="en-US" sz="1200" dirty="0">
-                <a:solidFill>
-                  <a:srgbClr val="6E6E6C"/>
-                </a:solidFill>
-                <a:latin typeface="Roboto" pitchFamily="34" charset="0"/>
-                <a:ea typeface="Roboto" pitchFamily="34" charset="-122"/>
-                <a:cs typeface="Roboto" pitchFamily="34" charset="-120"/>
-              </a:rPr>
-              <a:t>Avances semana 9 · Privacidad diferencial cuántica</a:t>
-            </a:r>
-            <a:endParaRPr lang="en-US" sz="1200" dirty="0"/>
-          </a:p>
-        </p:txBody>
-      </p:sp>
-      <p:sp>
-        <p:nvSpPr>
           <p:cNvPr id="39" name="Text 36"/>
           <p:cNvSpPr/>
           <p:nvPr/>
@@ -49917,50 +48597,6 @@
                 <a:cs typeface="Roboto" pitchFamily="34" charset="-120"/>
               </a:rPr>
               <a:t>Corregido el sesgo, el centro se mantiene y lo que crece es la dispersión: los valores quedan menos agrupados alrededor del centro. La evidencia es el histograma del Acto IV.</a:t>
-            </a:r>
-            <a:endParaRPr lang="en-US" sz="1200" dirty="0"/>
-          </a:p>
-        </p:txBody>
-      </p:sp>
-      <p:sp>
-        <p:nvSpPr>
-          <p:cNvPr id="21" name="Text 17"/>
-          <p:cNvSpPr/>
-          <p:nvPr/>
-        </p:nvSpPr>
-        <p:spPr>
-          <a:xfrm>
-            <a:off x="812800" y="6261100"/>
-            <a:ext cx="7848600" cy="215900"/>
-          </a:xfrm>
-          <a:prstGeom prst="rect">
-            <a:avLst/>
-          </a:prstGeom>
-          <a:noFill/>
-          <a:ln/>
-        </p:spPr>
-        <p:txBody>
-          <a:bodyPr wrap="square" lIns="0" tIns="0" rIns="0" bIns="0" rtlCol="0" anchor="t">
-            <a:normAutofit/>
-          </a:bodyPr>
-          <a:lstStyle/>
-          <a:p>
-            <a:pPr marL="0" indent="0" algn="l">
-              <a:lnSpc>
-                <a:spcPts val="1500"/>
-              </a:lnSpc>
-              <a:buNone/>
-            </a:pPr>
-            <a:r>
-              <a:rPr lang="en-US" sz="1200" dirty="0">
-                <a:solidFill>
-                  <a:srgbClr val="6E6E6C"/>
-                </a:solidFill>
-                <a:latin typeface="Roboto" pitchFamily="34" charset="0"/>
-                <a:ea typeface="Roboto" pitchFamily="34" charset="-122"/>
-                <a:cs typeface="Roboto" pitchFamily="34" charset="-120"/>
-              </a:rPr>
-              <a:t>Avances semana 9 · Privacidad diferencial cuántica</a:t>
             </a:r>
             <a:endParaRPr lang="en-US" sz="1200" dirty="0"/>
           </a:p>
@@ -50085,7 +48721,7 @@
         </p:spPr>
         <p:txBody>
           <a:bodyPr wrap="square" lIns="0" tIns="0" rIns="0" bIns="0" rtlCol="0" anchor="t">
-            <a:normAutofit/>
+            <a:normAutofit fontScale="92500"/>
           </a:bodyPr>
           <a:lstStyle/>
           <a:p>
@@ -51041,50 +49677,6 @@
               <a:t>.</a:t>
             </a:r>
             <a:endParaRPr lang="en-US" sz="1400" dirty="0"/>
-          </a:p>
-        </p:txBody>
-      </p:sp>
-      <p:sp>
-        <p:nvSpPr>
-          <p:cNvPr id="20" name="Text 16"/>
-          <p:cNvSpPr/>
-          <p:nvPr/>
-        </p:nvSpPr>
-        <p:spPr>
-          <a:xfrm>
-            <a:off x="812800" y="6261100"/>
-            <a:ext cx="7848600" cy="215900"/>
-          </a:xfrm>
-          <a:prstGeom prst="rect">
-            <a:avLst/>
-          </a:prstGeom>
-          <a:noFill/>
-          <a:ln/>
-        </p:spPr>
-        <p:txBody>
-          <a:bodyPr wrap="square" lIns="0" tIns="0" rIns="0" bIns="0" rtlCol="0" anchor="t">
-            <a:normAutofit/>
-          </a:bodyPr>
-          <a:lstStyle/>
-          <a:p>
-            <a:pPr marL="0" indent="0" algn="l">
-              <a:lnSpc>
-                <a:spcPts val="1500"/>
-              </a:lnSpc>
-              <a:buNone/>
-            </a:pPr>
-            <a:r>
-              <a:rPr lang="en-US" sz="1200" dirty="0">
-                <a:solidFill>
-                  <a:srgbClr val="6E6E6C"/>
-                </a:solidFill>
-                <a:latin typeface="Roboto" pitchFamily="34" charset="0"/>
-                <a:ea typeface="Roboto" pitchFamily="34" charset="-122"/>
-                <a:cs typeface="Roboto" pitchFamily="34" charset="-120"/>
-              </a:rPr>
-              <a:t>Avances semana 9 · Privacidad diferencial cuántica</a:t>
-            </a:r>
-            <a:endParaRPr lang="en-US" sz="1200" dirty="0"/>
           </a:p>
         </p:txBody>
       </p:sp>
